--- a/Figures/Figure2.pptx
+++ b/Figures/Figure2.pptx
@@ -6,6 +6,7 @@
   </p:sldMasterIdLst>
   <p:sldIdLst>
     <p:sldId id="256" r:id="rId2"/>
+    <p:sldId id="257" r:id="rId3"/>
   </p:sldIdLst>
   <p:sldSz cx="12192000" cy="6858000"/>
   <p:notesSz cx="6858000" cy="9144000"/>
@@ -104,6 +105,11 @@
       </a:defRPr>
     </a:lvl9pPr>
   </p:defaultTextStyle>
+  <p:extLst>
+    <p:ext uri="{EFAFB233-063F-42B5-8137-9DF3F51BA10A}">
+      <p15:sldGuideLst xmlns:p15="http://schemas.microsoft.com/office/powerpoint/2012/main"/>
+    </p:ext>
+  </p:extLst>
 </p:presentation>
 </file>
 
@@ -256,7 +262,7 @@
           <a:p>
             <a:fld id="{206E6329-831D-409B-BC19-F9579EE22BED}" type="datetimeFigureOut">
               <a:rPr lang="en-US" smtClean="0"/>
-              <a:t>1/24/2026</a:t>
+              <a:t>3/1/2026</a:t>
             </a:fld>
             <a:endParaRPr lang="en-US"/>
           </a:p>
@@ -456,7 +462,7 @@
           <a:p>
             <a:fld id="{206E6329-831D-409B-BC19-F9579EE22BED}" type="datetimeFigureOut">
               <a:rPr lang="en-US" smtClean="0"/>
-              <a:t>1/24/2026</a:t>
+              <a:t>3/1/2026</a:t>
             </a:fld>
             <a:endParaRPr lang="en-US"/>
           </a:p>
@@ -666,7 +672,7 @@
           <a:p>
             <a:fld id="{206E6329-831D-409B-BC19-F9579EE22BED}" type="datetimeFigureOut">
               <a:rPr lang="en-US" smtClean="0"/>
-              <a:t>1/24/2026</a:t>
+              <a:t>3/1/2026</a:t>
             </a:fld>
             <a:endParaRPr lang="en-US"/>
           </a:p>
@@ -866,7 +872,7 @@
           <a:p>
             <a:fld id="{206E6329-831D-409B-BC19-F9579EE22BED}" type="datetimeFigureOut">
               <a:rPr lang="en-US" smtClean="0"/>
-              <a:t>1/24/2026</a:t>
+              <a:t>3/1/2026</a:t>
             </a:fld>
             <a:endParaRPr lang="en-US"/>
           </a:p>
@@ -1142,7 +1148,7 @@
           <a:p>
             <a:fld id="{206E6329-831D-409B-BC19-F9579EE22BED}" type="datetimeFigureOut">
               <a:rPr lang="en-US" smtClean="0"/>
-              <a:t>1/24/2026</a:t>
+              <a:t>3/1/2026</a:t>
             </a:fld>
             <a:endParaRPr lang="en-US"/>
           </a:p>
@@ -1410,7 +1416,7 @@
           <a:p>
             <a:fld id="{206E6329-831D-409B-BC19-F9579EE22BED}" type="datetimeFigureOut">
               <a:rPr lang="en-US" smtClean="0"/>
-              <a:t>1/24/2026</a:t>
+              <a:t>3/1/2026</a:t>
             </a:fld>
             <a:endParaRPr lang="en-US"/>
           </a:p>
@@ -1825,7 +1831,7 @@
           <a:p>
             <a:fld id="{206E6329-831D-409B-BC19-F9579EE22BED}" type="datetimeFigureOut">
               <a:rPr lang="en-US" smtClean="0"/>
-              <a:t>1/24/2026</a:t>
+              <a:t>3/1/2026</a:t>
             </a:fld>
             <a:endParaRPr lang="en-US"/>
           </a:p>
@@ -1967,7 +1973,7 @@
           <a:p>
             <a:fld id="{206E6329-831D-409B-BC19-F9579EE22BED}" type="datetimeFigureOut">
               <a:rPr lang="en-US" smtClean="0"/>
-              <a:t>1/24/2026</a:t>
+              <a:t>3/1/2026</a:t>
             </a:fld>
             <a:endParaRPr lang="en-US"/>
           </a:p>
@@ -2080,7 +2086,7 @@
           <a:p>
             <a:fld id="{206E6329-831D-409B-BC19-F9579EE22BED}" type="datetimeFigureOut">
               <a:rPr lang="en-US" smtClean="0"/>
-              <a:t>1/24/2026</a:t>
+              <a:t>3/1/2026</a:t>
             </a:fld>
             <a:endParaRPr lang="en-US"/>
           </a:p>
@@ -2393,7 +2399,7 @@
           <a:p>
             <a:fld id="{206E6329-831D-409B-BC19-F9579EE22BED}" type="datetimeFigureOut">
               <a:rPr lang="en-US" smtClean="0"/>
-              <a:t>1/24/2026</a:t>
+              <a:t>3/1/2026</a:t>
             </a:fld>
             <a:endParaRPr lang="en-US"/>
           </a:p>
@@ -2682,7 +2688,7 @@
           <a:p>
             <a:fld id="{206E6329-831D-409B-BC19-F9579EE22BED}" type="datetimeFigureOut">
               <a:rPr lang="en-US" smtClean="0"/>
-              <a:t>1/24/2026</a:t>
+              <a:t>3/1/2026</a:t>
             </a:fld>
             <a:endParaRPr lang="en-US"/>
           </a:p>
@@ -2925,7 +2931,7 @@
           <a:p>
             <a:fld id="{206E6329-831D-409B-BC19-F9579EE22BED}" type="datetimeFigureOut">
               <a:rPr lang="en-US" smtClean="0"/>
-              <a:t>1/24/2026</a:t>
+              <a:t>3/1/2026</a:t>
             </a:fld>
             <a:endParaRPr lang="en-US"/>
           </a:p>
@@ -3342,1098 +3348,2340 @@
           <a:chExt cx="0" cy="0"/>
         </a:xfrm>
       </p:grpSpPr>
-      <p:sp>
-        <p:nvSpPr>
-          <p:cNvPr id="4" name="TextBox 21">
-            <a:extLst>
-              <a:ext uri="{FF2B5EF4-FFF2-40B4-BE49-F238E27FC236}">
-                <a16:creationId xmlns:a16="http://schemas.microsoft.com/office/drawing/2014/main" id="{A2F8B6CE-CC73-9DF4-3DF6-7EA996566EE8}"/>
-              </a:ext>
-            </a:extLst>
-          </p:cNvPr>
-          <p:cNvSpPr txBox="1"/>
+      <p:grpSp>
+        <p:nvGrpSpPr>
+          <p:cNvPr id="8" name="Gruppo 7">
+            <a:extLst>
+              <a:ext uri="{FF2B5EF4-FFF2-40B4-BE49-F238E27FC236}">
+                <a16:creationId xmlns:a16="http://schemas.microsoft.com/office/drawing/2014/main" id="{40AFB7FA-EBB3-2434-E3F9-93ED576F1E65}"/>
+              </a:ext>
+            </a:extLst>
+          </p:cNvPr>
+          <p:cNvGrpSpPr/>
           <p:nvPr/>
-        </p:nvSpPr>
-        <p:spPr>
+        </p:nvGrpSpPr>
+        <p:grpSpPr>
           <a:xfrm>
-            <a:off x="450456" y="135580"/>
-            <a:ext cx="370614" cy="461665"/>
+            <a:off x="450456" y="88738"/>
+            <a:ext cx="10017730" cy="6633682"/>
+            <a:chOff x="450456" y="88738"/>
+            <a:chExt cx="10017730" cy="6633682"/>
           </a:xfrm>
-          <a:prstGeom prst="rect">
-            <a:avLst/>
-          </a:prstGeom>
-          <a:noFill/>
-        </p:spPr>
-        <p:txBody>
-          <a:bodyPr wrap="none" rtlCol="0">
-            <a:spAutoFit/>
-          </a:bodyPr>
-          <a:lstStyle/>
-          <a:p>
-            <a:r>
-              <a:rPr lang="en-US" sz="2400" b="1" dirty="0">
-                <a:latin typeface="Calibri" panose="020F0502020204030204" pitchFamily="34" charset="0"/>
-                <a:cs typeface="Calibri" panose="020F0502020204030204" pitchFamily="34" charset="0"/>
-              </a:rPr>
-              <a:t>A</a:t>
-            </a:r>
-          </a:p>
-        </p:txBody>
-      </p:sp>
-      <p:sp>
-        <p:nvSpPr>
-          <p:cNvPr id="5" name="TextBox 22">
-            <a:extLst>
-              <a:ext uri="{FF2B5EF4-FFF2-40B4-BE49-F238E27FC236}">
-                <a16:creationId xmlns:a16="http://schemas.microsoft.com/office/drawing/2014/main" id="{E10ECB54-34EC-382B-BA78-5D9098541404}"/>
-              </a:ext>
-            </a:extLst>
-          </p:cNvPr>
-          <p:cNvSpPr txBox="1"/>
-          <p:nvPr/>
-        </p:nvSpPr>
-        <p:spPr>
-          <a:xfrm>
-            <a:off x="450456" y="3483003"/>
-            <a:ext cx="357790" cy="461665"/>
-          </a:xfrm>
-          <a:prstGeom prst="rect">
-            <a:avLst/>
-          </a:prstGeom>
-          <a:noFill/>
-        </p:spPr>
-        <p:txBody>
-          <a:bodyPr wrap="none" rtlCol="0">
-            <a:spAutoFit/>
-          </a:bodyPr>
-          <a:lstStyle/>
-          <a:p>
-            <a:r>
-              <a:rPr lang="en-US" sz="2400" b="1" dirty="0">
-                <a:latin typeface="Calibri" panose="020F0502020204030204" pitchFamily="34" charset="0"/>
-                <a:cs typeface="Calibri" panose="020F0502020204030204" pitchFamily="34" charset="0"/>
-              </a:rPr>
-              <a:t>B</a:t>
-            </a:r>
-          </a:p>
-        </p:txBody>
-      </p:sp>
-      <p:sp>
-        <p:nvSpPr>
-          <p:cNvPr id="6" name="TextBox 6">
-            <a:extLst>
-              <a:ext uri="{FF2B5EF4-FFF2-40B4-BE49-F238E27FC236}">
-                <a16:creationId xmlns:a16="http://schemas.microsoft.com/office/drawing/2014/main" id="{CF3E1D5F-B3C8-301F-C540-83FF9A907972}"/>
-              </a:ext>
-            </a:extLst>
-          </p:cNvPr>
-          <p:cNvSpPr txBox="1"/>
-          <p:nvPr/>
-        </p:nvSpPr>
-        <p:spPr>
-          <a:xfrm>
-            <a:off x="5747828" y="3483002"/>
-            <a:ext cx="378630" cy="461665"/>
-          </a:xfrm>
-          <a:prstGeom prst="rect">
-            <a:avLst/>
-          </a:prstGeom>
-          <a:noFill/>
-        </p:spPr>
-        <p:txBody>
-          <a:bodyPr wrap="none" rtlCol="0">
-            <a:spAutoFit/>
-          </a:bodyPr>
-          <a:lstStyle/>
-          <a:p>
-            <a:r>
-              <a:rPr lang="en-US" sz="2400" b="1" dirty="0">
-                <a:latin typeface="Calibri" panose="020F0502020204030204" pitchFamily="34" charset="0"/>
-                <a:cs typeface="Calibri" panose="020F0502020204030204" pitchFamily="34" charset="0"/>
-              </a:rPr>
-              <a:t>D</a:t>
-            </a:r>
-          </a:p>
-        </p:txBody>
-      </p:sp>
-      <p:sp>
-        <p:nvSpPr>
-          <p:cNvPr id="7" name="TextBox 7">
-            <a:extLst>
-              <a:ext uri="{FF2B5EF4-FFF2-40B4-BE49-F238E27FC236}">
-                <a16:creationId xmlns:a16="http://schemas.microsoft.com/office/drawing/2014/main" id="{D0F39915-A438-5D03-FF9E-C74A98753A93}"/>
-              </a:ext>
-            </a:extLst>
-          </p:cNvPr>
-          <p:cNvSpPr txBox="1"/>
-          <p:nvPr/>
-        </p:nvSpPr>
-        <p:spPr>
-          <a:xfrm>
-            <a:off x="5747828" y="135580"/>
-            <a:ext cx="348172" cy="461665"/>
-          </a:xfrm>
-          <a:prstGeom prst="rect">
-            <a:avLst/>
-          </a:prstGeom>
-          <a:noFill/>
-        </p:spPr>
-        <p:txBody>
-          <a:bodyPr wrap="none" rtlCol="0">
-            <a:spAutoFit/>
-          </a:bodyPr>
-          <a:lstStyle/>
-          <a:p>
-            <a:r>
-              <a:rPr lang="en-US" sz="2400" b="1" dirty="0">
-                <a:latin typeface="Calibri" panose="020F0502020204030204" pitchFamily="34" charset="0"/>
-                <a:cs typeface="Calibri" panose="020F0502020204030204" pitchFamily="34" charset="0"/>
-              </a:rPr>
-              <a:t>C</a:t>
-            </a:r>
-          </a:p>
-        </p:txBody>
-      </p:sp>
-      <p:sp>
-        <p:nvSpPr>
-          <p:cNvPr id="31" name="CasellaDiTesto 30">
-            <a:extLst>
-              <a:ext uri="{FF2B5EF4-FFF2-40B4-BE49-F238E27FC236}">
-                <a16:creationId xmlns:a16="http://schemas.microsoft.com/office/drawing/2014/main" id="{B8CAFFDB-A633-E2EC-2296-863DEC371B92}"/>
-              </a:ext>
-            </a:extLst>
-          </p:cNvPr>
-          <p:cNvSpPr txBox="1"/>
-          <p:nvPr/>
-        </p:nvSpPr>
-        <p:spPr>
-          <a:xfrm>
-            <a:off x="1350452" y="454782"/>
-            <a:ext cx="825867" cy="400110"/>
-          </a:xfrm>
-          <a:prstGeom prst="rect">
-            <a:avLst/>
-          </a:prstGeom>
-          <a:noFill/>
-        </p:spPr>
-        <p:txBody>
-          <a:bodyPr wrap="none" rtlCol="0">
-            <a:spAutoFit/>
-          </a:bodyPr>
-          <a:lstStyle/>
-          <a:p>
-            <a:r>
-              <a:rPr lang="en-US" sz="2000" b="1" dirty="0">
-                <a:latin typeface="Calibri" panose="020F0502020204030204" pitchFamily="34" charset="0"/>
-                <a:cs typeface="Calibri" panose="020F0502020204030204" pitchFamily="34" charset="0"/>
-              </a:rPr>
-              <a:t>F</a:t>
-            </a:r>
-            <a:r>
-              <a:rPr lang="en-US" sz="2000" dirty="0">
-                <a:latin typeface="Calibri" panose="020F0502020204030204" pitchFamily="34" charset="0"/>
-                <a:cs typeface="Calibri" panose="020F0502020204030204" pitchFamily="34" charset="0"/>
-              </a:rPr>
-              <a:t> AXIS</a:t>
-            </a:r>
-          </a:p>
-        </p:txBody>
-      </p:sp>
-      <p:sp>
-        <p:nvSpPr>
-          <p:cNvPr id="32" name="CasellaDiTesto 31">
-            <a:extLst>
-              <a:ext uri="{FF2B5EF4-FFF2-40B4-BE49-F238E27FC236}">
-                <a16:creationId xmlns:a16="http://schemas.microsoft.com/office/drawing/2014/main" id="{DDF48091-5576-F11D-6B77-CEC475F27ADB}"/>
-              </a:ext>
-            </a:extLst>
-          </p:cNvPr>
-          <p:cNvSpPr txBox="1"/>
-          <p:nvPr/>
-        </p:nvSpPr>
-        <p:spPr>
-          <a:xfrm>
-            <a:off x="3442184" y="457689"/>
-            <a:ext cx="825867" cy="400110"/>
-          </a:xfrm>
-          <a:prstGeom prst="rect">
-            <a:avLst/>
-          </a:prstGeom>
-          <a:noFill/>
-        </p:spPr>
-        <p:txBody>
-          <a:bodyPr wrap="none" rtlCol="0">
-            <a:spAutoFit/>
-          </a:bodyPr>
-          <a:lstStyle/>
-          <a:p>
-            <a:r>
-              <a:rPr lang="en-US" sz="2000" b="1" dirty="0">
-                <a:latin typeface="Calibri" panose="020F0502020204030204" pitchFamily="34" charset="0"/>
-                <a:cs typeface="Calibri" panose="020F0502020204030204" pitchFamily="34" charset="0"/>
-              </a:rPr>
-              <a:t>L </a:t>
-            </a:r>
-            <a:r>
-              <a:rPr lang="en-US" sz="2000" dirty="0">
-                <a:latin typeface="Calibri" panose="020F0502020204030204" pitchFamily="34" charset="0"/>
-                <a:cs typeface="Calibri" panose="020F0502020204030204" pitchFamily="34" charset="0"/>
-              </a:rPr>
-              <a:t>AXIS</a:t>
-            </a:r>
-          </a:p>
-        </p:txBody>
-      </p:sp>
-      <p:pic>
-        <p:nvPicPr>
-          <p:cNvPr id="37" name="Immagine 36" descr="Immagine che contiene testo, schermata, Carattere, design&#10;&#10;Il contenuto generato dall'IA potrebbe non essere corretto.">
-            <a:extLst>
-              <a:ext uri="{FF2B5EF4-FFF2-40B4-BE49-F238E27FC236}">
-                <a16:creationId xmlns:a16="http://schemas.microsoft.com/office/drawing/2014/main" id="{A43C7BCB-EC6D-A363-A2F7-9D92ED25F793}"/>
-              </a:ext>
-            </a:extLst>
-          </p:cNvPr>
-          <p:cNvPicPr>
-            <a:picLocks noChangeAspect="1"/>
-          </p:cNvPicPr>
-          <p:nvPr/>
-        </p:nvPicPr>
-        <p:blipFill>
-          <a:blip r:embed="rId2">
-            <a:extLst>
-              <a:ext uri="{28A0092B-C50C-407E-A947-70E740481C1C}">
-                <a14:useLocalDpi xmlns:a14="http://schemas.microsoft.com/office/drawing/2010/main" val="0"/>
-              </a:ext>
-            </a:extLst>
-          </a:blip>
-          <a:srcRect l="6311"/>
-          <a:stretch>
-            <a:fillRect/>
-          </a:stretch>
-        </p:blipFill>
-        <p:spPr>
-          <a:xfrm>
-            <a:off x="1118736" y="3877729"/>
-            <a:ext cx="3418843" cy="2606528"/>
-          </a:xfrm>
-          <a:prstGeom prst="rect">
-            <a:avLst/>
-          </a:prstGeom>
-        </p:spPr>
-      </p:pic>
-      <p:pic>
-        <p:nvPicPr>
-          <p:cNvPr id="39" name="Immagine 38" descr="Immagine che contiene testo, schermata, bianco e nero&#10;&#10;Il contenuto generato dall'IA potrebbe non essere corretto.">
-            <a:extLst>
-              <a:ext uri="{FF2B5EF4-FFF2-40B4-BE49-F238E27FC236}">
-                <a16:creationId xmlns:a16="http://schemas.microsoft.com/office/drawing/2014/main" id="{089B6330-B8E1-FB26-55F3-D01E77DF0DCD}"/>
-              </a:ext>
-            </a:extLst>
-          </p:cNvPr>
-          <p:cNvPicPr>
-            <a:picLocks noChangeAspect="1"/>
-          </p:cNvPicPr>
-          <p:nvPr/>
-        </p:nvPicPr>
-        <p:blipFill>
-          <a:blip r:embed="rId3">
-            <a:extLst>
-              <a:ext uri="{28A0092B-C50C-407E-A947-70E740481C1C}">
-                <a14:useLocalDpi xmlns:a14="http://schemas.microsoft.com/office/drawing/2010/main" val="0"/>
-              </a:ext>
-            </a:extLst>
-          </a:blip>
-          <a:srcRect l="9354"/>
-          <a:stretch>
-            <a:fillRect/>
-          </a:stretch>
-        </p:blipFill>
-        <p:spPr>
-          <a:xfrm>
-            <a:off x="6858000" y="3814229"/>
-            <a:ext cx="3610186" cy="2844805"/>
-          </a:xfrm>
-          <a:prstGeom prst="rect">
-            <a:avLst/>
-          </a:prstGeom>
-        </p:spPr>
-      </p:pic>
-      <p:pic>
-        <p:nvPicPr>
-          <p:cNvPr id="41" name="Immagine 40" descr="Immagine che contiene schermata, Rettangolo, testo, linea&#10;&#10;Il contenuto generato dall'IA potrebbe non essere corretto.">
-            <a:extLst>
-              <a:ext uri="{FF2B5EF4-FFF2-40B4-BE49-F238E27FC236}">
-                <a16:creationId xmlns:a16="http://schemas.microsoft.com/office/drawing/2014/main" id="{846EC3A3-FA69-B921-C4CD-6C2DA9C703F1}"/>
-              </a:ext>
-            </a:extLst>
-          </p:cNvPr>
-          <p:cNvPicPr>
-            <a:picLocks noChangeAspect="1"/>
-          </p:cNvPicPr>
-          <p:nvPr/>
-        </p:nvPicPr>
-        <p:blipFill>
-          <a:blip r:embed="rId4">
-            <a:extLst>
-              <a:ext uri="{28A0092B-C50C-407E-A947-70E740481C1C}">
-                <a14:useLocalDpi xmlns:a14="http://schemas.microsoft.com/office/drawing/2010/main" val="0"/>
-              </a:ext>
-            </a:extLst>
-          </a:blip>
-          <a:stretch>
-            <a:fillRect/>
-          </a:stretch>
-        </p:blipFill>
-        <p:spPr>
-          <a:xfrm>
-            <a:off x="6307708" y="454782"/>
-            <a:ext cx="4378337" cy="2501907"/>
-          </a:xfrm>
-          <a:prstGeom prst="rect">
-            <a:avLst/>
-          </a:prstGeom>
-        </p:spPr>
-      </p:pic>
-      <p:pic>
-        <p:nvPicPr>
-          <p:cNvPr id="42" name="Immagine 41" descr="Immagine che contiene testo, schermata, bianco e nero&#10;&#10;Il contenuto generato dall'IA potrebbe non essere corretto.">
-            <a:extLst>
-              <a:ext uri="{FF2B5EF4-FFF2-40B4-BE49-F238E27FC236}">
-                <a16:creationId xmlns:a16="http://schemas.microsoft.com/office/drawing/2014/main" id="{AB4DD9C4-E629-4C79-61B9-53234B744D58}"/>
-              </a:ext>
-            </a:extLst>
-          </p:cNvPr>
-          <p:cNvPicPr>
-            <a:picLocks noChangeAspect="1"/>
-          </p:cNvPicPr>
-          <p:nvPr/>
-        </p:nvPicPr>
-        <p:blipFill>
-          <a:blip r:embed="rId3">
-            <a:extLst>
-              <a:ext uri="{28A0092B-C50C-407E-A947-70E740481C1C}">
-                <a14:useLocalDpi xmlns:a14="http://schemas.microsoft.com/office/drawing/2010/main" val="0"/>
-              </a:ext>
-            </a:extLst>
-          </a:blip>
-          <a:srcRect r="90221"/>
-          <a:stretch>
-            <a:fillRect/>
-          </a:stretch>
-        </p:blipFill>
-        <p:spPr>
-          <a:xfrm>
-            <a:off x="587541" y="3877615"/>
-            <a:ext cx="389474" cy="2844805"/>
-          </a:xfrm>
-          <a:prstGeom prst="rect">
-            <a:avLst/>
-          </a:prstGeom>
-        </p:spPr>
-      </p:pic>
-      <p:pic>
-        <p:nvPicPr>
-          <p:cNvPr id="43" name="Immagine 42" descr="Immagine che contiene testo, schermata, bianco e nero&#10;&#10;Il contenuto generato dall'IA potrebbe non essere corretto.">
-            <a:extLst>
-              <a:ext uri="{FF2B5EF4-FFF2-40B4-BE49-F238E27FC236}">
-                <a16:creationId xmlns:a16="http://schemas.microsoft.com/office/drawing/2014/main" id="{F8839AB6-2E7D-6F0D-B754-CEC062767CC3}"/>
-              </a:ext>
-            </a:extLst>
-          </p:cNvPr>
-          <p:cNvPicPr>
-            <a:picLocks noChangeAspect="1"/>
-          </p:cNvPicPr>
-          <p:nvPr/>
-        </p:nvPicPr>
-        <p:blipFill>
-          <a:blip r:embed="rId3">
-            <a:extLst>
-              <a:ext uri="{28A0092B-C50C-407E-A947-70E740481C1C}">
-                <a14:useLocalDpi xmlns:a14="http://schemas.microsoft.com/office/drawing/2010/main" val="0"/>
-              </a:ext>
-            </a:extLst>
-          </a:blip>
-          <a:srcRect r="90221"/>
-          <a:stretch>
-            <a:fillRect/>
-          </a:stretch>
-        </p:blipFill>
-        <p:spPr>
-          <a:xfrm>
-            <a:off x="6299757" y="3758590"/>
-            <a:ext cx="389474" cy="2844805"/>
-          </a:xfrm>
-          <a:prstGeom prst="rect">
-            <a:avLst/>
-          </a:prstGeom>
-        </p:spPr>
-      </p:pic>
-      <p:cxnSp>
-        <p:nvCxnSpPr>
-          <p:cNvPr id="33" name="Connettore 2 32">
-            <a:extLst>
-              <a:ext uri="{FF2B5EF4-FFF2-40B4-BE49-F238E27FC236}">
-                <a16:creationId xmlns:a16="http://schemas.microsoft.com/office/drawing/2014/main" id="{AC3A5A04-85AE-0F0E-2E1E-398CFE09D888}"/>
-              </a:ext>
-            </a:extLst>
-          </p:cNvPr>
-          <p:cNvCxnSpPr/>
-          <p:nvPr/>
-        </p:nvCxnSpPr>
-        <p:spPr>
-          <a:xfrm flipV="1">
-            <a:off x="1683723" y="993359"/>
-            <a:ext cx="0" cy="1731258"/>
-          </a:xfrm>
-          <a:prstGeom prst="straightConnector1">
-            <a:avLst/>
-          </a:prstGeom>
-          <a:ln w="28575">
-            <a:tailEnd type="triangle"/>
-          </a:ln>
-        </p:spPr>
-        <p:style>
-          <a:lnRef idx="2">
-            <a:schemeClr val="dk1"/>
-          </a:lnRef>
-          <a:fillRef idx="0">
-            <a:schemeClr val="dk1"/>
-          </a:fillRef>
-          <a:effectRef idx="1">
-            <a:schemeClr val="dk1"/>
-          </a:effectRef>
-          <a:fontRef idx="minor">
-            <a:schemeClr val="tx1"/>
-          </a:fontRef>
-        </p:style>
-      </p:cxnSp>
-      <p:sp>
-        <p:nvSpPr>
-          <p:cNvPr id="44" name="Ovale 43">
-            <a:extLst>
-              <a:ext uri="{FF2B5EF4-FFF2-40B4-BE49-F238E27FC236}">
-                <a16:creationId xmlns:a16="http://schemas.microsoft.com/office/drawing/2014/main" id="{AFE64CD4-E1C5-32FF-7C6A-5A27BD22DF6C}"/>
-              </a:ext>
-            </a:extLst>
-          </p:cNvPr>
-          <p:cNvSpPr/>
-          <p:nvPr/>
-        </p:nvSpPr>
-        <p:spPr>
-          <a:xfrm>
-            <a:off x="1594951" y="1308053"/>
-            <a:ext cx="177543" cy="166977"/>
-          </a:xfrm>
-          <a:prstGeom prst="ellipse">
-            <a:avLst/>
-          </a:prstGeom>
-          <a:solidFill>
-            <a:srgbClr val="0070C0"/>
-          </a:solidFill>
-          <a:ln>
+        </p:grpSpPr>
+        <p:sp>
+          <p:nvSpPr>
+            <p:cNvPr id="4" name="TextBox 21">
+              <a:extLst>
+                <a:ext uri="{FF2B5EF4-FFF2-40B4-BE49-F238E27FC236}">
+                  <a16:creationId xmlns:a16="http://schemas.microsoft.com/office/drawing/2014/main" id="{A2F8B6CE-CC73-9DF4-3DF6-7EA996566EE8}"/>
+                </a:ext>
+              </a:extLst>
+            </p:cNvPr>
+            <p:cNvSpPr txBox="1"/>
+            <p:nvPr/>
+          </p:nvSpPr>
+          <p:spPr>
+            <a:xfrm>
+              <a:off x="450456" y="135580"/>
+              <a:ext cx="370614" cy="461665"/>
+            </a:xfrm>
+            <a:prstGeom prst="rect">
+              <a:avLst/>
+            </a:prstGeom>
             <a:noFill/>
-          </a:ln>
-        </p:spPr>
-        <p:style>
-          <a:lnRef idx="2">
-            <a:schemeClr val="accent1">
-              <a:shade val="15000"/>
-            </a:schemeClr>
-          </a:lnRef>
-          <a:fillRef idx="1">
-            <a:schemeClr val="accent1"/>
-          </a:fillRef>
-          <a:effectRef idx="0">
-            <a:schemeClr val="accent1"/>
-          </a:effectRef>
-          <a:fontRef idx="minor">
-            <a:schemeClr val="lt1"/>
-          </a:fontRef>
-        </p:style>
-        <p:txBody>
-          <a:bodyPr rtlCol="0" anchor="ctr"/>
-          <a:lstStyle/>
-          <a:p>
-            <a:pPr algn="ctr"/>
-            <a:endParaRPr lang="en-US"/>
-          </a:p>
-        </p:txBody>
-      </p:sp>
-      <p:sp>
-        <p:nvSpPr>
-          <p:cNvPr id="46" name="Ovale 45">
-            <a:extLst>
-              <a:ext uri="{FF2B5EF4-FFF2-40B4-BE49-F238E27FC236}">
-                <a16:creationId xmlns:a16="http://schemas.microsoft.com/office/drawing/2014/main" id="{9EE2A4A9-B39C-1DE3-EEE7-18CAADA74AD9}"/>
-              </a:ext>
-            </a:extLst>
-          </p:cNvPr>
-          <p:cNvSpPr/>
-          <p:nvPr/>
-        </p:nvSpPr>
-        <p:spPr>
-          <a:xfrm>
-            <a:off x="1594951" y="2378765"/>
-            <a:ext cx="177543" cy="166977"/>
-          </a:xfrm>
-          <a:prstGeom prst="ellipse">
-            <a:avLst/>
-          </a:prstGeom>
-          <a:solidFill>
-            <a:schemeClr val="accent2"/>
-          </a:solidFill>
-          <a:ln>
+          </p:spPr>
+          <p:txBody>
+            <a:bodyPr wrap="none" rtlCol="0">
+              <a:spAutoFit/>
+            </a:bodyPr>
+            <a:lstStyle/>
+            <a:p>
+              <a:r>
+                <a:rPr lang="en-US" sz="2400" b="1" dirty="0">
+                  <a:latin typeface="Calibri" panose="020F0502020204030204" pitchFamily="34" charset="0"/>
+                  <a:cs typeface="Calibri" panose="020F0502020204030204" pitchFamily="34" charset="0"/>
+                </a:rPr>
+                <a:t>A</a:t>
+              </a:r>
+            </a:p>
+          </p:txBody>
+        </p:sp>
+        <p:sp>
+          <p:nvSpPr>
+            <p:cNvPr id="5" name="TextBox 22">
+              <a:extLst>
+                <a:ext uri="{FF2B5EF4-FFF2-40B4-BE49-F238E27FC236}">
+                  <a16:creationId xmlns:a16="http://schemas.microsoft.com/office/drawing/2014/main" id="{E10ECB54-34EC-382B-BA78-5D9098541404}"/>
+                </a:ext>
+              </a:extLst>
+            </p:cNvPr>
+            <p:cNvSpPr txBox="1"/>
+            <p:nvPr/>
+          </p:nvSpPr>
+          <p:spPr>
+            <a:xfrm>
+              <a:off x="450456" y="3483003"/>
+              <a:ext cx="357790" cy="461665"/>
+            </a:xfrm>
+            <a:prstGeom prst="rect">
+              <a:avLst/>
+            </a:prstGeom>
             <a:noFill/>
-          </a:ln>
-        </p:spPr>
-        <p:style>
-          <a:lnRef idx="2">
-            <a:schemeClr val="accent1">
-              <a:shade val="15000"/>
-            </a:schemeClr>
-          </a:lnRef>
-          <a:fillRef idx="1">
-            <a:schemeClr val="accent1"/>
-          </a:fillRef>
-          <a:effectRef idx="0">
-            <a:schemeClr val="accent1"/>
-          </a:effectRef>
-          <a:fontRef idx="minor">
-            <a:schemeClr val="lt1"/>
-          </a:fontRef>
-        </p:style>
-        <p:txBody>
-          <a:bodyPr rtlCol="0" anchor="ctr"/>
-          <a:lstStyle/>
-          <a:p>
-            <a:pPr algn="ctr"/>
-            <a:endParaRPr lang="en-US" dirty="0"/>
-          </a:p>
-        </p:txBody>
-      </p:sp>
-      <p:cxnSp>
-        <p:nvCxnSpPr>
-          <p:cNvPr id="49" name="Connettore diritto 48">
-            <a:extLst>
-              <a:ext uri="{FF2B5EF4-FFF2-40B4-BE49-F238E27FC236}">
-                <a16:creationId xmlns:a16="http://schemas.microsoft.com/office/drawing/2014/main" id="{6AF85441-E978-7ED5-EA9C-8F6A9C989285}"/>
-              </a:ext>
-            </a:extLst>
-          </p:cNvPr>
-          <p:cNvCxnSpPr/>
-          <p:nvPr/>
-        </p:nvCxnSpPr>
-        <p:spPr>
-          <a:xfrm>
-            <a:off x="1598927" y="1908607"/>
-            <a:ext cx="177543" cy="0"/>
-          </a:xfrm>
-          <a:prstGeom prst="line">
-            <a:avLst/>
-          </a:prstGeom>
-        </p:spPr>
-        <p:style>
-          <a:lnRef idx="2">
-            <a:schemeClr val="dk1"/>
-          </a:lnRef>
-          <a:fillRef idx="0">
-            <a:schemeClr val="dk1"/>
-          </a:fillRef>
-          <a:effectRef idx="1">
-            <a:schemeClr val="dk1"/>
-          </a:effectRef>
-          <a:fontRef idx="minor">
-            <a:schemeClr val="tx1"/>
-          </a:fontRef>
-        </p:style>
-      </p:cxnSp>
-      <p:sp>
-        <p:nvSpPr>
-          <p:cNvPr id="50" name="CasellaDiTesto 49">
-            <a:extLst>
-              <a:ext uri="{FF2B5EF4-FFF2-40B4-BE49-F238E27FC236}">
-                <a16:creationId xmlns:a16="http://schemas.microsoft.com/office/drawing/2014/main" id="{D4724CA8-E11E-0FD3-8810-CBCEF7519272}"/>
-              </a:ext>
-            </a:extLst>
-          </p:cNvPr>
-          <p:cNvSpPr txBox="1"/>
-          <p:nvPr/>
-        </p:nvSpPr>
-        <p:spPr>
-          <a:xfrm>
-            <a:off x="1196403" y="854892"/>
-            <a:ext cx="308098" cy="369332"/>
-          </a:xfrm>
-          <a:prstGeom prst="rect">
-            <a:avLst/>
-          </a:prstGeom>
-          <a:noFill/>
-        </p:spPr>
-        <p:txBody>
-          <a:bodyPr wrap="none" rtlCol="0">
-            <a:spAutoFit/>
-          </a:bodyPr>
-          <a:lstStyle/>
-          <a:p>
-            <a:r>
-              <a:rPr lang="en-US" dirty="0"/>
-              <a:t>+</a:t>
-            </a:r>
-          </a:p>
-        </p:txBody>
-      </p:sp>
-      <p:sp>
-        <p:nvSpPr>
-          <p:cNvPr id="51" name="CasellaDiTesto 50">
-            <a:extLst>
-              <a:ext uri="{FF2B5EF4-FFF2-40B4-BE49-F238E27FC236}">
-                <a16:creationId xmlns:a16="http://schemas.microsoft.com/office/drawing/2014/main" id="{7EC182C1-4A4F-6033-D351-7327CC47958A}"/>
-              </a:ext>
-            </a:extLst>
-          </p:cNvPr>
-          <p:cNvSpPr txBox="1"/>
-          <p:nvPr/>
-        </p:nvSpPr>
-        <p:spPr>
-          <a:xfrm>
-            <a:off x="1201997" y="2454302"/>
-            <a:ext cx="263214" cy="369332"/>
-          </a:xfrm>
-          <a:prstGeom prst="rect">
-            <a:avLst/>
-          </a:prstGeom>
-          <a:noFill/>
-        </p:spPr>
-        <p:txBody>
-          <a:bodyPr wrap="none" rtlCol="0">
-            <a:spAutoFit/>
-          </a:bodyPr>
-          <a:lstStyle/>
-          <a:p>
-            <a:r>
-              <a:rPr lang="en-US" dirty="0"/>
-              <a:t>-</a:t>
-            </a:r>
-          </a:p>
-        </p:txBody>
-      </p:sp>
-      <p:cxnSp>
-        <p:nvCxnSpPr>
-          <p:cNvPr id="54" name="Connettore 2 53">
-            <a:extLst>
-              <a:ext uri="{FF2B5EF4-FFF2-40B4-BE49-F238E27FC236}">
-                <a16:creationId xmlns:a16="http://schemas.microsoft.com/office/drawing/2014/main" id="{4BFE377E-D6B1-A370-EE5D-720577795DC3}"/>
-              </a:ext>
-            </a:extLst>
-          </p:cNvPr>
-          <p:cNvCxnSpPr/>
-          <p:nvPr/>
-        </p:nvCxnSpPr>
-        <p:spPr>
-          <a:xfrm flipV="1">
-            <a:off x="3859233" y="993359"/>
-            <a:ext cx="0" cy="1731258"/>
-          </a:xfrm>
-          <a:prstGeom prst="straightConnector1">
-            <a:avLst/>
-          </a:prstGeom>
-          <a:ln w="28575">
-            <a:tailEnd type="triangle"/>
-          </a:ln>
-        </p:spPr>
-        <p:style>
-          <a:lnRef idx="2">
-            <a:schemeClr val="dk1"/>
-          </a:lnRef>
-          <a:fillRef idx="0">
-            <a:schemeClr val="dk1"/>
-          </a:fillRef>
-          <a:effectRef idx="1">
-            <a:schemeClr val="dk1"/>
-          </a:effectRef>
-          <a:fontRef idx="minor">
-            <a:schemeClr val="tx1"/>
-          </a:fontRef>
-        </p:style>
-      </p:cxnSp>
-      <p:sp>
-        <p:nvSpPr>
-          <p:cNvPr id="55" name="Ovale 54">
-            <a:extLst>
-              <a:ext uri="{FF2B5EF4-FFF2-40B4-BE49-F238E27FC236}">
-                <a16:creationId xmlns:a16="http://schemas.microsoft.com/office/drawing/2014/main" id="{1E437734-DD81-1891-51C0-CDFEF1BB3F0A}"/>
-              </a:ext>
-            </a:extLst>
-          </p:cNvPr>
-          <p:cNvSpPr/>
-          <p:nvPr/>
-        </p:nvSpPr>
-        <p:spPr>
-          <a:xfrm>
-            <a:off x="3770461" y="1311966"/>
-            <a:ext cx="177543" cy="166977"/>
-          </a:xfrm>
-          <a:prstGeom prst="ellipse">
-            <a:avLst/>
-          </a:prstGeom>
-          <a:solidFill>
-            <a:schemeClr val="accent2"/>
-          </a:solidFill>
-          <a:ln>
+          </p:spPr>
+          <p:txBody>
+            <a:bodyPr wrap="none" rtlCol="0">
+              <a:spAutoFit/>
+            </a:bodyPr>
+            <a:lstStyle/>
+            <a:p>
+              <a:r>
+                <a:rPr lang="en-US" sz="2400" b="1" dirty="0">
+                  <a:latin typeface="Calibri" panose="020F0502020204030204" pitchFamily="34" charset="0"/>
+                  <a:cs typeface="Calibri" panose="020F0502020204030204" pitchFamily="34" charset="0"/>
+                </a:rPr>
+                <a:t>B</a:t>
+              </a:r>
+            </a:p>
+          </p:txBody>
+        </p:sp>
+        <p:sp>
+          <p:nvSpPr>
+            <p:cNvPr id="6" name="TextBox 6">
+              <a:extLst>
+                <a:ext uri="{FF2B5EF4-FFF2-40B4-BE49-F238E27FC236}">
+                  <a16:creationId xmlns:a16="http://schemas.microsoft.com/office/drawing/2014/main" id="{CF3E1D5F-B3C8-301F-C540-83FF9A907972}"/>
+                </a:ext>
+              </a:extLst>
+            </p:cNvPr>
+            <p:cNvSpPr txBox="1"/>
+            <p:nvPr/>
+          </p:nvSpPr>
+          <p:spPr>
+            <a:xfrm>
+              <a:off x="5747828" y="3483002"/>
+              <a:ext cx="378630" cy="461665"/>
+            </a:xfrm>
+            <a:prstGeom prst="rect">
+              <a:avLst/>
+            </a:prstGeom>
             <a:noFill/>
-          </a:ln>
-        </p:spPr>
-        <p:style>
-          <a:lnRef idx="2">
-            <a:schemeClr val="accent1">
-              <a:shade val="15000"/>
-            </a:schemeClr>
-          </a:lnRef>
-          <a:fillRef idx="1">
-            <a:schemeClr val="accent1"/>
-          </a:fillRef>
-          <a:effectRef idx="0">
-            <a:schemeClr val="accent1"/>
-          </a:effectRef>
-          <a:fontRef idx="minor">
-            <a:schemeClr val="lt1"/>
-          </a:fontRef>
-        </p:style>
-        <p:txBody>
-          <a:bodyPr rtlCol="0" anchor="ctr"/>
-          <a:lstStyle/>
-          <a:p>
-            <a:pPr algn="ctr"/>
-            <a:endParaRPr lang="en-US" dirty="0"/>
-          </a:p>
-        </p:txBody>
-      </p:sp>
-      <p:sp>
-        <p:nvSpPr>
-          <p:cNvPr id="56" name="Ovale 55">
-            <a:extLst>
-              <a:ext uri="{FF2B5EF4-FFF2-40B4-BE49-F238E27FC236}">
-                <a16:creationId xmlns:a16="http://schemas.microsoft.com/office/drawing/2014/main" id="{00B2FBD9-01EE-044C-E8C5-CF55B303BEE8}"/>
-              </a:ext>
-            </a:extLst>
-          </p:cNvPr>
-          <p:cNvSpPr/>
-          <p:nvPr/>
-        </p:nvSpPr>
-        <p:spPr>
-          <a:xfrm>
-            <a:off x="3770461" y="2378765"/>
-            <a:ext cx="177543" cy="166977"/>
-          </a:xfrm>
-          <a:prstGeom prst="ellipse">
-            <a:avLst/>
-          </a:prstGeom>
-          <a:solidFill>
-            <a:srgbClr val="0070C0"/>
-          </a:solidFill>
-          <a:ln>
+          </p:spPr>
+          <p:txBody>
+            <a:bodyPr wrap="none" rtlCol="0">
+              <a:spAutoFit/>
+            </a:bodyPr>
+            <a:lstStyle/>
+            <a:p>
+              <a:r>
+                <a:rPr lang="en-US" sz="2400" b="1" dirty="0">
+                  <a:latin typeface="Calibri" panose="020F0502020204030204" pitchFamily="34" charset="0"/>
+                  <a:cs typeface="Calibri" panose="020F0502020204030204" pitchFamily="34" charset="0"/>
+                </a:rPr>
+                <a:t>D</a:t>
+              </a:r>
+            </a:p>
+          </p:txBody>
+        </p:sp>
+        <p:sp>
+          <p:nvSpPr>
+            <p:cNvPr id="7" name="TextBox 7">
+              <a:extLst>
+                <a:ext uri="{FF2B5EF4-FFF2-40B4-BE49-F238E27FC236}">
+                  <a16:creationId xmlns:a16="http://schemas.microsoft.com/office/drawing/2014/main" id="{D0F39915-A438-5D03-FF9E-C74A98753A93}"/>
+                </a:ext>
+              </a:extLst>
+            </p:cNvPr>
+            <p:cNvSpPr txBox="1"/>
+            <p:nvPr/>
+          </p:nvSpPr>
+          <p:spPr>
+            <a:xfrm>
+              <a:off x="5747828" y="135580"/>
+              <a:ext cx="348172" cy="461665"/>
+            </a:xfrm>
+            <a:prstGeom prst="rect">
+              <a:avLst/>
+            </a:prstGeom>
             <a:noFill/>
-          </a:ln>
-        </p:spPr>
-        <p:style>
-          <a:lnRef idx="2">
-            <a:schemeClr val="accent1">
-              <a:shade val="15000"/>
-            </a:schemeClr>
-          </a:lnRef>
-          <a:fillRef idx="1">
-            <a:schemeClr val="accent1"/>
-          </a:fillRef>
-          <a:effectRef idx="0">
-            <a:schemeClr val="accent1"/>
-          </a:effectRef>
-          <a:fontRef idx="minor">
-            <a:schemeClr val="lt1"/>
-          </a:fontRef>
-        </p:style>
-        <p:txBody>
-          <a:bodyPr rtlCol="0" anchor="ctr"/>
-          <a:lstStyle/>
-          <a:p>
-            <a:pPr algn="ctr"/>
-            <a:endParaRPr lang="en-US"/>
-          </a:p>
-        </p:txBody>
-      </p:sp>
-      <p:cxnSp>
-        <p:nvCxnSpPr>
-          <p:cNvPr id="57" name="Connettore diritto 56">
-            <a:extLst>
-              <a:ext uri="{FF2B5EF4-FFF2-40B4-BE49-F238E27FC236}">
-                <a16:creationId xmlns:a16="http://schemas.microsoft.com/office/drawing/2014/main" id="{16B14D18-82ED-5AC1-8E16-3B88F38CBF4E}"/>
-              </a:ext>
-            </a:extLst>
-          </p:cNvPr>
-          <p:cNvCxnSpPr/>
-          <p:nvPr/>
-        </p:nvCxnSpPr>
-        <p:spPr>
-          <a:xfrm>
-            <a:off x="3774437" y="1908607"/>
-            <a:ext cx="177543" cy="0"/>
-          </a:xfrm>
-          <a:prstGeom prst="line">
-            <a:avLst/>
-          </a:prstGeom>
-        </p:spPr>
-        <p:style>
-          <a:lnRef idx="2">
-            <a:schemeClr val="dk1"/>
-          </a:lnRef>
-          <a:fillRef idx="0">
-            <a:schemeClr val="dk1"/>
-          </a:fillRef>
-          <a:effectRef idx="1">
-            <a:schemeClr val="dk1"/>
-          </a:effectRef>
-          <a:fontRef idx="minor">
-            <a:schemeClr val="tx1"/>
-          </a:fontRef>
-        </p:style>
-      </p:cxnSp>
-      <p:sp>
-        <p:nvSpPr>
-          <p:cNvPr id="58" name="CasellaDiTesto 57">
-            <a:extLst>
-              <a:ext uri="{FF2B5EF4-FFF2-40B4-BE49-F238E27FC236}">
-                <a16:creationId xmlns:a16="http://schemas.microsoft.com/office/drawing/2014/main" id="{3B846A6B-83D4-F5E0-4A26-37D579615696}"/>
-              </a:ext>
-            </a:extLst>
-          </p:cNvPr>
-          <p:cNvSpPr txBox="1"/>
-          <p:nvPr/>
-        </p:nvSpPr>
-        <p:spPr>
-          <a:xfrm>
-            <a:off x="3371913" y="854892"/>
-            <a:ext cx="308098" cy="369332"/>
-          </a:xfrm>
-          <a:prstGeom prst="rect">
-            <a:avLst/>
-          </a:prstGeom>
-          <a:noFill/>
-        </p:spPr>
-        <p:txBody>
-          <a:bodyPr wrap="none" rtlCol="0">
-            <a:spAutoFit/>
-          </a:bodyPr>
-          <a:lstStyle/>
-          <a:p>
-            <a:r>
-              <a:rPr lang="en-US" dirty="0"/>
-              <a:t>+</a:t>
-            </a:r>
-          </a:p>
-        </p:txBody>
-      </p:sp>
-      <p:sp>
-        <p:nvSpPr>
-          <p:cNvPr id="59" name="CasellaDiTesto 58">
-            <a:extLst>
-              <a:ext uri="{FF2B5EF4-FFF2-40B4-BE49-F238E27FC236}">
-                <a16:creationId xmlns:a16="http://schemas.microsoft.com/office/drawing/2014/main" id="{7DC8478F-E378-4CD4-85C4-0939E1037AA0}"/>
-              </a:ext>
-            </a:extLst>
-          </p:cNvPr>
-          <p:cNvSpPr txBox="1"/>
-          <p:nvPr/>
-        </p:nvSpPr>
-        <p:spPr>
-          <a:xfrm>
-            <a:off x="3377507" y="2454302"/>
-            <a:ext cx="263214" cy="369332"/>
-          </a:xfrm>
-          <a:prstGeom prst="rect">
-            <a:avLst/>
-          </a:prstGeom>
-          <a:noFill/>
-        </p:spPr>
-        <p:txBody>
-          <a:bodyPr wrap="none" rtlCol="0">
-            <a:spAutoFit/>
-          </a:bodyPr>
-          <a:lstStyle/>
-          <a:p>
-            <a:r>
-              <a:rPr lang="en-US" dirty="0"/>
-              <a:t>-</a:t>
-            </a:r>
-          </a:p>
-        </p:txBody>
-      </p:sp>
-      <p:sp>
-        <p:nvSpPr>
-          <p:cNvPr id="60" name="CasellaDiTesto 59">
-            <a:extLst>
-              <a:ext uri="{FF2B5EF4-FFF2-40B4-BE49-F238E27FC236}">
-                <a16:creationId xmlns:a16="http://schemas.microsoft.com/office/drawing/2014/main" id="{42761C37-CFFB-28AC-A8FA-D4EE4DBA5CD7}"/>
-              </a:ext>
-            </a:extLst>
-          </p:cNvPr>
-          <p:cNvSpPr txBox="1"/>
-          <p:nvPr/>
-        </p:nvSpPr>
-        <p:spPr>
-          <a:xfrm>
-            <a:off x="1895432" y="1224224"/>
-            <a:ext cx="617477" cy="338554"/>
-          </a:xfrm>
-          <a:prstGeom prst="rect">
-            <a:avLst/>
-          </a:prstGeom>
-          <a:noFill/>
-        </p:spPr>
-        <p:txBody>
-          <a:bodyPr wrap="none" rtlCol="0">
-            <a:spAutoFit/>
-          </a:bodyPr>
-          <a:lstStyle/>
-          <a:p>
-            <a:r>
-              <a:rPr lang="en-US" sz="1600" b="1" dirty="0">
-                <a:solidFill>
-                  <a:srgbClr val="0070C0"/>
-                </a:solidFill>
-                <a:latin typeface="Calibri" panose="020F0502020204030204" pitchFamily="34" charset="0"/>
-                <a:cs typeface="Calibri" panose="020F0502020204030204" pitchFamily="34" charset="0"/>
-              </a:rPr>
-              <a:t>FTVR</a:t>
-            </a:r>
-          </a:p>
-        </p:txBody>
-      </p:sp>
-      <p:sp>
-        <p:nvSpPr>
-          <p:cNvPr id="61" name="CasellaDiTesto 60">
-            <a:extLst>
-              <a:ext uri="{FF2B5EF4-FFF2-40B4-BE49-F238E27FC236}">
-                <a16:creationId xmlns:a16="http://schemas.microsoft.com/office/drawing/2014/main" id="{3EB394A1-562A-89F6-64A5-62FB8C354059}"/>
-              </a:ext>
-            </a:extLst>
-          </p:cNvPr>
-          <p:cNvSpPr txBox="1"/>
-          <p:nvPr/>
-        </p:nvSpPr>
-        <p:spPr>
-          <a:xfrm>
-            <a:off x="4133398" y="2277587"/>
-            <a:ext cx="617477" cy="338554"/>
-          </a:xfrm>
-          <a:prstGeom prst="rect">
-            <a:avLst/>
-          </a:prstGeom>
-          <a:noFill/>
-        </p:spPr>
-        <p:txBody>
-          <a:bodyPr wrap="none" rtlCol="0">
-            <a:spAutoFit/>
-          </a:bodyPr>
-          <a:lstStyle/>
-          <a:p>
-            <a:r>
-              <a:rPr lang="en-US" sz="1600" b="1" dirty="0">
-                <a:solidFill>
-                  <a:srgbClr val="0070C0"/>
-                </a:solidFill>
-                <a:latin typeface="Calibri" panose="020F0502020204030204" pitchFamily="34" charset="0"/>
-                <a:cs typeface="Calibri" panose="020F0502020204030204" pitchFamily="34" charset="0"/>
-              </a:rPr>
-              <a:t>FTVR</a:t>
-            </a:r>
-          </a:p>
-        </p:txBody>
-      </p:sp>
-      <p:sp>
-        <p:nvSpPr>
-          <p:cNvPr id="62" name="CasellaDiTesto 61">
-            <a:extLst>
-              <a:ext uri="{FF2B5EF4-FFF2-40B4-BE49-F238E27FC236}">
-                <a16:creationId xmlns:a16="http://schemas.microsoft.com/office/drawing/2014/main" id="{F7963925-A522-EBBA-C6D1-DE2082112F22}"/>
-              </a:ext>
-            </a:extLst>
-          </p:cNvPr>
-          <p:cNvSpPr txBox="1"/>
-          <p:nvPr/>
-        </p:nvSpPr>
-        <p:spPr>
-          <a:xfrm>
-            <a:off x="4131428" y="1222264"/>
-            <a:ext cx="619080" cy="338554"/>
-          </a:xfrm>
-          <a:prstGeom prst="rect">
-            <a:avLst/>
-          </a:prstGeom>
-          <a:noFill/>
-        </p:spPr>
-        <p:txBody>
-          <a:bodyPr wrap="none" rtlCol="0">
-            <a:spAutoFit/>
-          </a:bodyPr>
-          <a:lstStyle/>
-          <a:p>
-            <a:r>
-              <a:rPr lang="en-US" sz="1600" b="1" dirty="0">
-                <a:solidFill>
-                  <a:schemeClr val="accent2"/>
-                </a:solidFill>
-                <a:latin typeface="Calibri" panose="020F0502020204030204" pitchFamily="34" charset="0"/>
-                <a:cs typeface="Calibri" panose="020F0502020204030204" pitchFamily="34" charset="0"/>
-              </a:rPr>
-              <a:t>ZLRN</a:t>
-            </a:r>
-          </a:p>
-        </p:txBody>
-      </p:sp>
-      <p:sp>
-        <p:nvSpPr>
-          <p:cNvPr id="63" name="CasellaDiTesto 62">
-            <a:extLst>
-              <a:ext uri="{FF2B5EF4-FFF2-40B4-BE49-F238E27FC236}">
-                <a16:creationId xmlns:a16="http://schemas.microsoft.com/office/drawing/2014/main" id="{C203117A-20E6-EAB1-224D-E8097B889DA4}"/>
-              </a:ext>
-            </a:extLst>
-          </p:cNvPr>
-          <p:cNvSpPr txBox="1"/>
-          <p:nvPr/>
-        </p:nvSpPr>
-        <p:spPr>
-          <a:xfrm>
-            <a:off x="1895432" y="2275898"/>
-            <a:ext cx="619080" cy="338554"/>
-          </a:xfrm>
-          <a:prstGeom prst="rect">
-            <a:avLst/>
-          </a:prstGeom>
-          <a:noFill/>
-        </p:spPr>
-        <p:txBody>
-          <a:bodyPr wrap="none" rtlCol="0">
-            <a:spAutoFit/>
-          </a:bodyPr>
-          <a:lstStyle/>
-          <a:p>
-            <a:r>
-              <a:rPr lang="en-US" sz="1600" b="1" dirty="0">
-                <a:solidFill>
-                  <a:schemeClr val="accent2"/>
-                </a:solidFill>
-                <a:latin typeface="Calibri" panose="020F0502020204030204" pitchFamily="34" charset="0"/>
-                <a:cs typeface="Calibri" panose="020F0502020204030204" pitchFamily="34" charset="0"/>
-              </a:rPr>
-              <a:t>ZLRN</a:t>
-            </a:r>
-          </a:p>
-        </p:txBody>
-      </p:sp>
+          </p:spPr>
+          <p:txBody>
+            <a:bodyPr wrap="none" rtlCol="0">
+              <a:spAutoFit/>
+            </a:bodyPr>
+            <a:lstStyle/>
+            <a:p>
+              <a:r>
+                <a:rPr lang="en-US" sz="2400" b="1" dirty="0">
+                  <a:latin typeface="Calibri" panose="020F0502020204030204" pitchFamily="34" charset="0"/>
+                  <a:cs typeface="Calibri" panose="020F0502020204030204" pitchFamily="34" charset="0"/>
+                </a:rPr>
+                <a:t>C</a:t>
+              </a:r>
+            </a:p>
+          </p:txBody>
+        </p:sp>
+        <p:sp>
+          <p:nvSpPr>
+            <p:cNvPr id="31" name="CasellaDiTesto 30">
+              <a:extLst>
+                <a:ext uri="{FF2B5EF4-FFF2-40B4-BE49-F238E27FC236}">
+                  <a16:creationId xmlns:a16="http://schemas.microsoft.com/office/drawing/2014/main" id="{B8CAFFDB-A633-E2EC-2296-863DEC371B92}"/>
+                </a:ext>
+              </a:extLst>
+            </p:cNvPr>
+            <p:cNvSpPr txBox="1"/>
+            <p:nvPr/>
+          </p:nvSpPr>
+          <p:spPr>
+            <a:xfrm>
+              <a:off x="1350452" y="454782"/>
+              <a:ext cx="825867" cy="400110"/>
+            </a:xfrm>
+            <a:prstGeom prst="rect">
+              <a:avLst/>
+            </a:prstGeom>
+            <a:noFill/>
+          </p:spPr>
+          <p:txBody>
+            <a:bodyPr wrap="none" rtlCol="0">
+              <a:spAutoFit/>
+            </a:bodyPr>
+            <a:lstStyle/>
+            <a:p>
+              <a:r>
+                <a:rPr lang="en-US" sz="2000" b="1" dirty="0">
+                  <a:latin typeface="Calibri" panose="020F0502020204030204" pitchFamily="34" charset="0"/>
+                  <a:cs typeface="Calibri" panose="020F0502020204030204" pitchFamily="34" charset="0"/>
+                </a:rPr>
+                <a:t>F</a:t>
+              </a:r>
+              <a:r>
+                <a:rPr lang="en-US" sz="2000" dirty="0">
+                  <a:latin typeface="Calibri" panose="020F0502020204030204" pitchFamily="34" charset="0"/>
+                  <a:cs typeface="Calibri" panose="020F0502020204030204" pitchFamily="34" charset="0"/>
+                </a:rPr>
+                <a:t> AXIS</a:t>
+              </a:r>
+            </a:p>
+          </p:txBody>
+        </p:sp>
+        <p:sp>
+          <p:nvSpPr>
+            <p:cNvPr id="32" name="CasellaDiTesto 31">
+              <a:extLst>
+                <a:ext uri="{FF2B5EF4-FFF2-40B4-BE49-F238E27FC236}">
+                  <a16:creationId xmlns:a16="http://schemas.microsoft.com/office/drawing/2014/main" id="{DDF48091-5576-F11D-6B77-CEC475F27ADB}"/>
+                </a:ext>
+              </a:extLst>
+            </p:cNvPr>
+            <p:cNvSpPr txBox="1"/>
+            <p:nvPr/>
+          </p:nvSpPr>
+          <p:spPr>
+            <a:xfrm>
+              <a:off x="3442184" y="457689"/>
+              <a:ext cx="825867" cy="400110"/>
+            </a:xfrm>
+            <a:prstGeom prst="rect">
+              <a:avLst/>
+            </a:prstGeom>
+            <a:noFill/>
+          </p:spPr>
+          <p:txBody>
+            <a:bodyPr wrap="none" rtlCol="0">
+              <a:spAutoFit/>
+            </a:bodyPr>
+            <a:lstStyle/>
+            <a:p>
+              <a:r>
+                <a:rPr lang="en-US" sz="2000" b="1" dirty="0">
+                  <a:latin typeface="Calibri" panose="020F0502020204030204" pitchFamily="34" charset="0"/>
+                  <a:cs typeface="Calibri" panose="020F0502020204030204" pitchFamily="34" charset="0"/>
+                </a:rPr>
+                <a:t>L </a:t>
+              </a:r>
+              <a:r>
+                <a:rPr lang="en-US" sz="2000" dirty="0">
+                  <a:latin typeface="Calibri" panose="020F0502020204030204" pitchFamily="34" charset="0"/>
+                  <a:cs typeface="Calibri" panose="020F0502020204030204" pitchFamily="34" charset="0"/>
+                </a:rPr>
+                <a:t>AXIS</a:t>
+              </a:r>
+            </a:p>
+          </p:txBody>
+        </p:sp>
+        <p:pic>
+          <p:nvPicPr>
+            <p:cNvPr id="37" name="Immagine 36" descr="Immagine che contiene testo, schermata, Carattere, design&#10;&#10;Il contenuto generato dall'IA potrebbe non essere corretto.">
+              <a:extLst>
+                <a:ext uri="{FF2B5EF4-FFF2-40B4-BE49-F238E27FC236}">
+                  <a16:creationId xmlns:a16="http://schemas.microsoft.com/office/drawing/2014/main" id="{A43C7BCB-EC6D-A363-A2F7-9D92ED25F793}"/>
+                </a:ext>
+              </a:extLst>
+            </p:cNvPr>
+            <p:cNvPicPr>
+              <a:picLocks noChangeAspect="1"/>
+            </p:cNvPicPr>
+            <p:nvPr/>
+          </p:nvPicPr>
+          <p:blipFill>
+            <a:blip r:embed="rId2">
+              <a:extLst>
+                <a:ext uri="{28A0092B-C50C-407E-A947-70E740481C1C}">
+                  <a14:useLocalDpi xmlns:a14="http://schemas.microsoft.com/office/drawing/2010/main" val="0"/>
+                </a:ext>
+              </a:extLst>
+            </a:blip>
+            <a:srcRect l="6311"/>
+            <a:stretch>
+              <a:fillRect/>
+            </a:stretch>
+          </p:blipFill>
+          <p:spPr>
+            <a:xfrm>
+              <a:off x="1118736" y="3877729"/>
+              <a:ext cx="3418843" cy="2606528"/>
+            </a:xfrm>
+            <a:prstGeom prst="rect">
+              <a:avLst/>
+            </a:prstGeom>
+          </p:spPr>
+        </p:pic>
+        <p:pic>
+          <p:nvPicPr>
+            <p:cNvPr id="39" name="Immagine 38" descr="Immagine che contiene testo, schermata, bianco e nero&#10;&#10;Il contenuto generato dall'IA potrebbe non essere corretto.">
+              <a:extLst>
+                <a:ext uri="{FF2B5EF4-FFF2-40B4-BE49-F238E27FC236}">
+                  <a16:creationId xmlns:a16="http://schemas.microsoft.com/office/drawing/2014/main" id="{089B6330-B8E1-FB26-55F3-D01E77DF0DCD}"/>
+                </a:ext>
+              </a:extLst>
+            </p:cNvPr>
+            <p:cNvPicPr>
+              <a:picLocks noChangeAspect="1"/>
+            </p:cNvPicPr>
+            <p:nvPr/>
+          </p:nvPicPr>
+          <p:blipFill>
+            <a:blip r:embed="rId3">
+              <a:extLst>
+                <a:ext uri="{28A0092B-C50C-407E-A947-70E740481C1C}">
+                  <a14:useLocalDpi xmlns:a14="http://schemas.microsoft.com/office/drawing/2010/main" val="0"/>
+                </a:ext>
+              </a:extLst>
+            </a:blip>
+            <a:srcRect l="9354"/>
+            <a:stretch>
+              <a:fillRect/>
+            </a:stretch>
+          </p:blipFill>
+          <p:spPr>
+            <a:xfrm>
+              <a:off x="6858000" y="3814229"/>
+              <a:ext cx="3610186" cy="2844805"/>
+            </a:xfrm>
+            <a:prstGeom prst="rect">
+              <a:avLst/>
+            </a:prstGeom>
+          </p:spPr>
+        </p:pic>
+        <p:pic>
+          <p:nvPicPr>
+            <p:cNvPr id="42" name="Immagine 41" descr="Immagine che contiene testo, schermata, bianco e nero&#10;&#10;Il contenuto generato dall'IA potrebbe non essere corretto.">
+              <a:extLst>
+                <a:ext uri="{FF2B5EF4-FFF2-40B4-BE49-F238E27FC236}">
+                  <a16:creationId xmlns:a16="http://schemas.microsoft.com/office/drawing/2014/main" id="{AB4DD9C4-E629-4C79-61B9-53234B744D58}"/>
+                </a:ext>
+              </a:extLst>
+            </p:cNvPr>
+            <p:cNvPicPr>
+              <a:picLocks noChangeAspect="1"/>
+            </p:cNvPicPr>
+            <p:nvPr/>
+          </p:nvPicPr>
+          <p:blipFill>
+            <a:blip r:embed="rId3">
+              <a:extLst>
+                <a:ext uri="{28A0092B-C50C-407E-A947-70E740481C1C}">
+                  <a14:useLocalDpi xmlns:a14="http://schemas.microsoft.com/office/drawing/2010/main" val="0"/>
+                </a:ext>
+              </a:extLst>
+            </a:blip>
+            <a:srcRect r="90221"/>
+            <a:stretch>
+              <a:fillRect/>
+            </a:stretch>
+          </p:blipFill>
+          <p:spPr>
+            <a:xfrm>
+              <a:off x="587541" y="3877615"/>
+              <a:ext cx="389474" cy="2844805"/>
+            </a:xfrm>
+            <a:prstGeom prst="rect">
+              <a:avLst/>
+            </a:prstGeom>
+          </p:spPr>
+        </p:pic>
+        <p:pic>
+          <p:nvPicPr>
+            <p:cNvPr id="43" name="Immagine 42" descr="Immagine che contiene testo, schermata, bianco e nero&#10;&#10;Il contenuto generato dall'IA potrebbe non essere corretto.">
+              <a:extLst>
+                <a:ext uri="{FF2B5EF4-FFF2-40B4-BE49-F238E27FC236}">
+                  <a16:creationId xmlns:a16="http://schemas.microsoft.com/office/drawing/2014/main" id="{F8839AB6-2E7D-6F0D-B754-CEC062767CC3}"/>
+                </a:ext>
+              </a:extLst>
+            </p:cNvPr>
+            <p:cNvPicPr>
+              <a:picLocks noChangeAspect="1"/>
+            </p:cNvPicPr>
+            <p:nvPr/>
+          </p:nvPicPr>
+          <p:blipFill>
+            <a:blip r:embed="rId3">
+              <a:extLst>
+                <a:ext uri="{28A0092B-C50C-407E-A947-70E740481C1C}">
+                  <a14:useLocalDpi xmlns:a14="http://schemas.microsoft.com/office/drawing/2010/main" val="0"/>
+                </a:ext>
+              </a:extLst>
+            </a:blip>
+            <a:srcRect r="90221"/>
+            <a:stretch>
+              <a:fillRect/>
+            </a:stretch>
+          </p:blipFill>
+          <p:spPr>
+            <a:xfrm>
+              <a:off x="6299757" y="3758590"/>
+              <a:ext cx="389474" cy="2844805"/>
+            </a:xfrm>
+            <a:prstGeom prst="rect">
+              <a:avLst/>
+            </a:prstGeom>
+          </p:spPr>
+        </p:pic>
+        <p:cxnSp>
+          <p:nvCxnSpPr>
+            <p:cNvPr id="33" name="Connettore 2 32">
+              <a:extLst>
+                <a:ext uri="{FF2B5EF4-FFF2-40B4-BE49-F238E27FC236}">
+                  <a16:creationId xmlns:a16="http://schemas.microsoft.com/office/drawing/2014/main" id="{AC3A5A04-85AE-0F0E-2E1E-398CFE09D888}"/>
+                </a:ext>
+              </a:extLst>
+            </p:cNvPr>
+            <p:cNvCxnSpPr/>
+            <p:nvPr/>
+          </p:nvCxnSpPr>
+          <p:spPr>
+            <a:xfrm flipV="1">
+              <a:off x="1683723" y="993359"/>
+              <a:ext cx="0" cy="1731258"/>
+            </a:xfrm>
+            <a:prstGeom prst="straightConnector1">
+              <a:avLst/>
+            </a:prstGeom>
+            <a:ln w="28575">
+              <a:tailEnd type="triangle"/>
+            </a:ln>
+          </p:spPr>
+          <p:style>
+            <a:lnRef idx="2">
+              <a:schemeClr val="dk1"/>
+            </a:lnRef>
+            <a:fillRef idx="0">
+              <a:schemeClr val="dk1"/>
+            </a:fillRef>
+            <a:effectRef idx="1">
+              <a:schemeClr val="dk1"/>
+            </a:effectRef>
+            <a:fontRef idx="minor">
+              <a:schemeClr val="tx1"/>
+            </a:fontRef>
+          </p:style>
+        </p:cxnSp>
+        <p:sp>
+          <p:nvSpPr>
+            <p:cNvPr id="44" name="Ovale 43">
+              <a:extLst>
+                <a:ext uri="{FF2B5EF4-FFF2-40B4-BE49-F238E27FC236}">
+                  <a16:creationId xmlns:a16="http://schemas.microsoft.com/office/drawing/2014/main" id="{AFE64CD4-E1C5-32FF-7C6A-5A27BD22DF6C}"/>
+                </a:ext>
+              </a:extLst>
+            </p:cNvPr>
+            <p:cNvSpPr/>
+            <p:nvPr/>
+          </p:nvSpPr>
+          <p:spPr>
+            <a:xfrm>
+              <a:off x="1594951" y="1308053"/>
+              <a:ext cx="177543" cy="166977"/>
+            </a:xfrm>
+            <a:prstGeom prst="ellipse">
+              <a:avLst/>
+            </a:prstGeom>
+            <a:solidFill>
+              <a:srgbClr val="0070C0"/>
+            </a:solidFill>
+            <a:ln>
+              <a:noFill/>
+            </a:ln>
+          </p:spPr>
+          <p:style>
+            <a:lnRef idx="2">
+              <a:schemeClr val="accent1">
+                <a:shade val="15000"/>
+              </a:schemeClr>
+            </a:lnRef>
+            <a:fillRef idx="1">
+              <a:schemeClr val="accent1"/>
+            </a:fillRef>
+            <a:effectRef idx="0">
+              <a:schemeClr val="accent1"/>
+            </a:effectRef>
+            <a:fontRef idx="minor">
+              <a:schemeClr val="lt1"/>
+            </a:fontRef>
+          </p:style>
+          <p:txBody>
+            <a:bodyPr rtlCol="0" anchor="ctr"/>
+            <a:lstStyle/>
+            <a:p>
+              <a:pPr algn="ctr"/>
+              <a:endParaRPr lang="en-US"/>
+            </a:p>
+          </p:txBody>
+        </p:sp>
+        <p:sp>
+          <p:nvSpPr>
+            <p:cNvPr id="46" name="Ovale 45">
+              <a:extLst>
+                <a:ext uri="{FF2B5EF4-FFF2-40B4-BE49-F238E27FC236}">
+                  <a16:creationId xmlns:a16="http://schemas.microsoft.com/office/drawing/2014/main" id="{9EE2A4A9-B39C-1DE3-EEE7-18CAADA74AD9}"/>
+                </a:ext>
+              </a:extLst>
+            </p:cNvPr>
+            <p:cNvSpPr/>
+            <p:nvPr/>
+          </p:nvSpPr>
+          <p:spPr>
+            <a:xfrm>
+              <a:off x="1594951" y="2378765"/>
+              <a:ext cx="177543" cy="166977"/>
+            </a:xfrm>
+            <a:prstGeom prst="ellipse">
+              <a:avLst/>
+            </a:prstGeom>
+            <a:solidFill>
+              <a:schemeClr val="accent2"/>
+            </a:solidFill>
+            <a:ln>
+              <a:noFill/>
+            </a:ln>
+          </p:spPr>
+          <p:style>
+            <a:lnRef idx="2">
+              <a:schemeClr val="accent1">
+                <a:shade val="15000"/>
+              </a:schemeClr>
+            </a:lnRef>
+            <a:fillRef idx="1">
+              <a:schemeClr val="accent1"/>
+            </a:fillRef>
+            <a:effectRef idx="0">
+              <a:schemeClr val="accent1"/>
+            </a:effectRef>
+            <a:fontRef idx="minor">
+              <a:schemeClr val="lt1"/>
+            </a:fontRef>
+          </p:style>
+          <p:txBody>
+            <a:bodyPr rtlCol="0" anchor="ctr"/>
+            <a:lstStyle/>
+            <a:p>
+              <a:pPr algn="ctr"/>
+              <a:endParaRPr lang="en-US" dirty="0"/>
+            </a:p>
+          </p:txBody>
+        </p:sp>
+        <p:cxnSp>
+          <p:nvCxnSpPr>
+            <p:cNvPr id="49" name="Connettore diritto 48">
+              <a:extLst>
+                <a:ext uri="{FF2B5EF4-FFF2-40B4-BE49-F238E27FC236}">
+                  <a16:creationId xmlns:a16="http://schemas.microsoft.com/office/drawing/2014/main" id="{6AF85441-E978-7ED5-EA9C-8F6A9C989285}"/>
+                </a:ext>
+              </a:extLst>
+            </p:cNvPr>
+            <p:cNvCxnSpPr/>
+            <p:nvPr/>
+          </p:nvCxnSpPr>
+          <p:spPr>
+            <a:xfrm>
+              <a:off x="1598927" y="1908607"/>
+              <a:ext cx="177543" cy="0"/>
+            </a:xfrm>
+            <a:prstGeom prst="line">
+              <a:avLst/>
+            </a:prstGeom>
+          </p:spPr>
+          <p:style>
+            <a:lnRef idx="2">
+              <a:schemeClr val="dk1"/>
+            </a:lnRef>
+            <a:fillRef idx="0">
+              <a:schemeClr val="dk1"/>
+            </a:fillRef>
+            <a:effectRef idx="1">
+              <a:schemeClr val="dk1"/>
+            </a:effectRef>
+            <a:fontRef idx="minor">
+              <a:schemeClr val="tx1"/>
+            </a:fontRef>
+          </p:style>
+        </p:cxnSp>
+        <p:sp>
+          <p:nvSpPr>
+            <p:cNvPr id="50" name="CasellaDiTesto 49">
+              <a:extLst>
+                <a:ext uri="{FF2B5EF4-FFF2-40B4-BE49-F238E27FC236}">
+                  <a16:creationId xmlns:a16="http://schemas.microsoft.com/office/drawing/2014/main" id="{D4724CA8-E11E-0FD3-8810-CBCEF7519272}"/>
+                </a:ext>
+              </a:extLst>
+            </p:cNvPr>
+            <p:cNvSpPr txBox="1"/>
+            <p:nvPr/>
+          </p:nvSpPr>
+          <p:spPr>
+            <a:xfrm>
+              <a:off x="1196403" y="854892"/>
+              <a:ext cx="308098" cy="369332"/>
+            </a:xfrm>
+            <a:prstGeom prst="rect">
+              <a:avLst/>
+            </a:prstGeom>
+            <a:noFill/>
+          </p:spPr>
+          <p:txBody>
+            <a:bodyPr wrap="none" rtlCol="0">
+              <a:spAutoFit/>
+            </a:bodyPr>
+            <a:lstStyle/>
+            <a:p>
+              <a:r>
+                <a:rPr lang="en-US" dirty="0"/>
+                <a:t>+</a:t>
+              </a:r>
+            </a:p>
+          </p:txBody>
+        </p:sp>
+        <p:sp>
+          <p:nvSpPr>
+            <p:cNvPr id="51" name="CasellaDiTesto 50">
+              <a:extLst>
+                <a:ext uri="{FF2B5EF4-FFF2-40B4-BE49-F238E27FC236}">
+                  <a16:creationId xmlns:a16="http://schemas.microsoft.com/office/drawing/2014/main" id="{7EC182C1-4A4F-6033-D351-7327CC47958A}"/>
+                </a:ext>
+              </a:extLst>
+            </p:cNvPr>
+            <p:cNvSpPr txBox="1"/>
+            <p:nvPr/>
+          </p:nvSpPr>
+          <p:spPr>
+            <a:xfrm>
+              <a:off x="1201997" y="2454302"/>
+              <a:ext cx="263214" cy="369332"/>
+            </a:xfrm>
+            <a:prstGeom prst="rect">
+              <a:avLst/>
+            </a:prstGeom>
+            <a:noFill/>
+          </p:spPr>
+          <p:txBody>
+            <a:bodyPr wrap="none" rtlCol="0">
+              <a:spAutoFit/>
+            </a:bodyPr>
+            <a:lstStyle/>
+            <a:p>
+              <a:r>
+                <a:rPr lang="en-US" dirty="0"/>
+                <a:t>-</a:t>
+              </a:r>
+            </a:p>
+          </p:txBody>
+        </p:sp>
+        <p:cxnSp>
+          <p:nvCxnSpPr>
+            <p:cNvPr id="54" name="Connettore 2 53">
+              <a:extLst>
+                <a:ext uri="{FF2B5EF4-FFF2-40B4-BE49-F238E27FC236}">
+                  <a16:creationId xmlns:a16="http://schemas.microsoft.com/office/drawing/2014/main" id="{4BFE377E-D6B1-A370-EE5D-720577795DC3}"/>
+                </a:ext>
+              </a:extLst>
+            </p:cNvPr>
+            <p:cNvCxnSpPr/>
+            <p:nvPr/>
+          </p:nvCxnSpPr>
+          <p:spPr>
+            <a:xfrm flipV="1">
+              <a:off x="3859233" y="993359"/>
+              <a:ext cx="0" cy="1731258"/>
+            </a:xfrm>
+            <a:prstGeom prst="straightConnector1">
+              <a:avLst/>
+            </a:prstGeom>
+            <a:ln w="28575">
+              <a:tailEnd type="triangle"/>
+            </a:ln>
+          </p:spPr>
+          <p:style>
+            <a:lnRef idx="2">
+              <a:schemeClr val="dk1"/>
+            </a:lnRef>
+            <a:fillRef idx="0">
+              <a:schemeClr val="dk1"/>
+            </a:fillRef>
+            <a:effectRef idx="1">
+              <a:schemeClr val="dk1"/>
+            </a:effectRef>
+            <a:fontRef idx="minor">
+              <a:schemeClr val="tx1"/>
+            </a:fontRef>
+          </p:style>
+        </p:cxnSp>
+        <p:sp>
+          <p:nvSpPr>
+            <p:cNvPr id="55" name="Ovale 54">
+              <a:extLst>
+                <a:ext uri="{FF2B5EF4-FFF2-40B4-BE49-F238E27FC236}">
+                  <a16:creationId xmlns:a16="http://schemas.microsoft.com/office/drawing/2014/main" id="{1E437734-DD81-1891-51C0-CDFEF1BB3F0A}"/>
+                </a:ext>
+              </a:extLst>
+            </p:cNvPr>
+            <p:cNvSpPr/>
+            <p:nvPr/>
+          </p:nvSpPr>
+          <p:spPr>
+            <a:xfrm>
+              <a:off x="3770461" y="1311966"/>
+              <a:ext cx="177543" cy="166977"/>
+            </a:xfrm>
+            <a:prstGeom prst="ellipse">
+              <a:avLst/>
+            </a:prstGeom>
+            <a:solidFill>
+              <a:schemeClr val="accent2"/>
+            </a:solidFill>
+            <a:ln>
+              <a:noFill/>
+            </a:ln>
+          </p:spPr>
+          <p:style>
+            <a:lnRef idx="2">
+              <a:schemeClr val="accent1">
+                <a:shade val="15000"/>
+              </a:schemeClr>
+            </a:lnRef>
+            <a:fillRef idx="1">
+              <a:schemeClr val="accent1"/>
+            </a:fillRef>
+            <a:effectRef idx="0">
+              <a:schemeClr val="accent1"/>
+            </a:effectRef>
+            <a:fontRef idx="minor">
+              <a:schemeClr val="lt1"/>
+            </a:fontRef>
+          </p:style>
+          <p:txBody>
+            <a:bodyPr rtlCol="0" anchor="ctr"/>
+            <a:lstStyle/>
+            <a:p>
+              <a:pPr algn="ctr"/>
+              <a:endParaRPr lang="en-US" dirty="0"/>
+            </a:p>
+          </p:txBody>
+        </p:sp>
+        <p:sp>
+          <p:nvSpPr>
+            <p:cNvPr id="56" name="Ovale 55">
+              <a:extLst>
+                <a:ext uri="{FF2B5EF4-FFF2-40B4-BE49-F238E27FC236}">
+                  <a16:creationId xmlns:a16="http://schemas.microsoft.com/office/drawing/2014/main" id="{00B2FBD9-01EE-044C-E8C5-CF55B303BEE8}"/>
+                </a:ext>
+              </a:extLst>
+            </p:cNvPr>
+            <p:cNvSpPr/>
+            <p:nvPr/>
+          </p:nvSpPr>
+          <p:spPr>
+            <a:xfrm>
+              <a:off x="3770461" y="2378765"/>
+              <a:ext cx="177543" cy="166977"/>
+            </a:xfrm>
+            <a:prstGeom prst="ellipse">
+              <a:avLst/>
+            </a:prstGeom>
+            <a:solidFill>
+              <a:srgbClr val="0070C0"/>
+            </a:solidFill>
+            <a:ln>
+              <a:noFill/>
+            </a:ln>
+          </p:spPr>
+          <p:style>
+            <a:lnRef idx="2">
+              <a:schemeClr val="accent1">
+                <a:shade val="15000"/>
+              </a:schemeClr>
+            </a:lnRef>
+            <a:fillRef idx="1">
+              <a:schemeClr val="accent1"/>
+            </a:fillRef>
+            <a:effectRef idx="0">
+              <a:schemeClr val="accent1"/>
+            </a:effectRef>
+            <a:fontRef idx="minor">
+              <a:schemeClr val="lt1"/>
+            </a:fontRef>
+          </p:style>
+          <p:txBody>
+            <a:bodyPr rtlCol="0" anchor="ctr"/>
+            <a:lstStyle/>
+            <a:p>
+              <a:pPr algn="ctr"/>
+              <a:endParaRPr lang="en-US"/>
+            </a:p>
+          </p:txBody>
+        </p:sp>
+        <p:cxnSp>
+          <p:nvCxnSpPr>
+            <p:cNvPr id="57" name="Connettore diritto 56">
+              <a:extLst>
+                <a:ext uri="{FF2B5EF4-FFF2-40B4-BE49-F238E27FC236}">
+                  <a16:creationId xmlns:a16="http://schemas.microsoft.com/office/drawing/2014/main" id="{16B14D18-82ED-5AC1-8E16-3B88F38CBF4E}"/>
+                </a:ext>
+              </a:extLst>
+            </p:cNvPr>
+            <p:cNvCxnSpPr/>
+            <p:nvPr/>
+          </p:nvCxnSpPr>
+          <p:spPr>
+            <a:xfrm>
+              <a:off x="3774437" y="1908607"/>
+              <a:ext cx="177543" cy="0"/>
+            </a:xfrm>
+            <a:prstGeom prst="line">
+              <a:avLst/>
+            </a:prstGeom>
+          </p:spPr>
+          <p:style>
+            <a:lnRef idx="2">
+              <a:schemeClr val="dk1"/>
+            </a:lnRef>
+            <a:fillRef idx="0">
+              <a:schemeClr val="dk1"/>
+            </a:fillRef>
+            <a:effectRef idx="1">
+              <a:schemeClr val="dk1"/>
+            </a:effectRef>
+            <a:fontRef idx="minor">
+              <a:schemeClr val="tx1"/>
+            </a:fontRef>
+          </p:style>
+        </p:cxnSp>
+        <p:sp>
+          <p:nvSpPr>
+            <p:cNvPr id="58" name="CasellaDiTesto 57">
+              <a:extLst>
+                <a:ext uri="{FF2B5EF4-FFF2-40B4-BE49-F238E27FC236}">
+                  <a16:creationId xmlns:a16="http://schemas.microsoft.com/office/drawing/2014/main" id="{3B846A6B-83D4-F5E0-4A26-37D579615696}"/>
+                </a:ext>
+              </a:extLst>
+            </p:cNvPr>
+            <p:cNvSpPr txBox="1"/>
+            <p:nvPr/>
+          </p:nvSpPr>
+          <p:spPr>
+            <a:xfrm>
+              <a:off x="3371913" y="854892"/>
+              <a:ext cx="308098" cy="369332"/>
+            </a:xfrm>
+            <a:prstGeom prst="rect">
+              <a:avLst/>
+            </a:prstGeom>
+            <a:noFill/>
+          </p:spPr>
+          <p:txBody>
+            <a:bodyPr wrap="none" rtlCol="0">
+              <a:spAutoFit/>
+            </a:bodyPr>
+            <a:lstStyle/>
+            <a:p>
+              <a:r>
+                <a:rPr lang="en-US" dirty="0"/>
+                <a:t>+</a:t>
+              </a:r>
+            </a:p>
+          </p:txBody>
+        </p:sp>
+        <p:sp>
+          <p:nvSpPr>
+            <p:cNvPr id="59" name="CasellaDiTesto 58">
+              <a:extLst>
+                <a:ext uri="{FF2B5EF4-FFF2-40B4-BE49-F238E27FC236}">
+                  <a16:creationId xmlns:a16="http://schemas.microsoft.com/office/drawing/2014/main" id="{7DC8478F-E378-4CD4-85C4-0939E1037AA0}"/>
+                </a:ext>
+              </a:extLst>
+            </p:cNvPr>
+            <p:cNvSpPr txBox="1"/>
+            <p:nvPr/>
+          </p:nvSpPr>
+          <p:spPr>
+            <a:xfrm>
+              <a:off x="3377507" y="2454302"/>
+              <a:ext cx="263214" cy="369332"/>
+            </a:xfrm>
+            <a:prstGeom prst="rect">
+              <a:avLst/>
+            </a:prstGeom>
+            <a:noFill/>
+          </p:spPr>
+          <p:txBody>
+            <a:bodyPr wrap="none" rtlCol="0">
+              <a:spAutoFit/>
+            </a:bodyPr>
+            <a:lstStyle/>
+            <a:p>
+              <a:r>
+                <a:rPr lang="en-US" dirty="0"/>
+                <a:t>-</a:t>
+              </a:r>
+            </a:p>
+          </p:txBody>
+        </p:sp>
+        <p:sp>
+          <p:nvSpPr>
+            <p:cNvPr id="60" name="CasellaDiTesto 59">
+              <a:extLst>
+                <a:ext uri="{FF2B5EF4-FFF2-40B4-BE49-F238E27FC236}">
+                  <a16:creationId xmlns:a16="http://schemas.microsoft.com/office/drawing/2014/main" id="{42761C37-CFFB-28AC-A8FA-D4EE4DBA5CD7}"/>
+                </a:ext>
+              </a:extLst>
+            </p:cNvPr>
+            <p:cNvSpPr txBox="1"/>
+            <p:nvPr/>
+          </p:nvSpPr>
+          <p:spPr>
+            <a:xfrm>
+              <a:off x="1895432" y="1224224"/>
+              <a:ext cx="617477" cy="338554"/>
+            </a:xfrm>
+            <a:prstGeom prst="rect">
+              <a:avLst/>
+            </a:prstGeom>
+            <a:noFill/>
+          </p:spPr>
+          <p:txBody>
+            <a:bodyPr wrap="none" rtlCol="0">
+              <a:spAutoFit/>
+            </a:bodyPr>
+            <a:lstStyle/>
+            <a:p>
+              <a:r>
+                <a:rPr lang="en-US" sz="1600" b="1" dirty="0">
+                  <a:solidFill>
+                    <a:srgbClr val="0070C0"/>
+                  </a:solidFill>
+                  <a:latin typeface="Calibri" panose="020F0502020204030204" pitchFamily="34" charset="0"/>
+                  <a:cs typeface="Calibri" panose="020F0502020204030204" pitchFamily="34" charset="0"/>
+                </a:rPr>
+                <a:t>FTVR</a:t>
+              </a:r>
+            </a:p>
+          </p:txBody>
+        </p:sp>
+        <p:sp>
+          <p:nvSpPr>
+            <p:cNvPr id="61" name="CasellaDiTesto 60">
+              <a:extLst>
+                <a:ext uri="{FF2B5EF4-FFF2-40B4-BE49-F238E27FC236}">
+                  <a16:creationId xmlns:a16="http://schemas.microsoft.com/office/drawing/2014/main" id="{3EB394A1-562A-89F6-64A5-62FB8C354059}"/>
+                </a:ext>
+              </a:extLst>
+            </p:cNvPr>
+            <p:cNvSpPr txBox="1"/>
+            <p:nvPr/>
+          </p:nvSpPr>
+          <p:spPr>
+            <a:xfrm>
+              <a:off x="4133398" y="2277587"/>
+              <a:ext cx="617477" cy="338554"/>
+            </a:xfrm>
+            <a:prstGeom prst="rect">
+              <a:avLst/>
+            </a:prstGeom>
+            <a:noFill/>
+          </p:spPr>
+          <p:txBody>
+            <a:bodyPr wrap="none" rtlCol="0">
+              <a:spAutoFit/>
+            </a:bodyPr>
+            <a:lstStyle/>
+            <a:p>
+              <a:r>
+                <a:rPr lang="en-US" sz="1600" b="1" dirty="0">
+                  <a:solidFill>
+                    <a:srgbClr val="0070C0"/>
+                  </a:solidFill>
+                  <a:latin typeface="Calibri" panose="020F0502020204030204" pitchFamily="34" charset="0"/>
+                  <a:cs typeface="Calibri" panose="020F0502020204030204" pitchFamily="34" charset="0"/>
+                </a:rPr>
+                <a:t>FTVR</a:t>
+              </a:r>
+            </a:p>
+          </p:txBody>
+        </p:sp>
+        <p:sp>
+          <p:nvSpPr>
+            <p:cNvPr id="62" name="CasellaDiTesto 61">
+              <a:extLst>
+                <a:ext uri="{FF2B5EF4-FFF2-40B4-BE49-F238E27FC236}">
+                  <a16:creationId xmlns:a16="http://schemas.microsoft.com/office/drawing/2014/main" id="{F7963925-A522-EBBA-C6D1-DE2082112F22}"/>
+                </a:ext>
+              </a:extLst>
+            </p:cNvPr>
+            <p:cNvSpPr txBox="1"/>
+            <p:nvPr/>
+          </p:nvSpPr>
+          <p:spPr>
+            <a:xfrm>
+              <a:off x="4131428" y="1222264"/>
+              <a:ext cx="619080" cy="338554"/>
+            </a:xfrm>
+            <a:prstGeom prst="rect">
+              <a:avLst/>
+            </a:prstGeom>
+            <a:noFill/>
+          </p:spPr>
+          <p:txBody>
+            <a:bodyPr wrap="none" rtlCol="0">
+              <a:spAutoFit/>
+            </a:bodyPr>
+            <a:lstStyle/>
+            <a:p>
+              <a:r>
+                <a:rPr lang="en-US" sz="1600" b="1" dirty="0">
+                  <a:solidFill>
+                    <a:schemeClr val="accent2"/>
+                  </a:solidFill>
+                  <a:latin typeface="Calibri" panose="020F0502020204030204" pitchFamily="34" charset="0"/>
+                  <a:cs typeface="Calibri" panose="020F0502020204030204" pitchFamily="34" charset="0"/>
+                </a:rPr>
+                <a:t>ZLRN</a:t>
+              </a:r>
+            </a:p>
+          </p:txBody>
+        </p:sp>
+        <p:sp>
+          <p:nvSpPr>
+            <p:cNvPr id="63" name="CasellaDiTesto 62">
+              <a:extLst>
+                <a:ext uri="{FF2B5EF4-FFF2-40B4-BE49-F238E27FC236}">
+                  <a16:creationId xmlns:a16="http://schemas.microsoft.com/office/drawing/2014/main" id="{C203117A-20E6-EAB1-224D-E8097B889DA4}"/>
+                </a:ext>
+              </a:extLst>
+            </p:cNvPr>
+            <p:cNvSpPr txBox="1"/>
+            <p:nvPr/>
+          </p:nvSpPr>
+          <p:spPr>
+            <a:xfrm>
+              <a:off x="1895432" y="2275898"/>
+              <a:ext cx="619080" cy="338554"/>
+            </a:xfrm>
+            <a:prstGeom prst="rect">
+              <a:avLst/>
+            </a:prstGeom>
+            <a:noFill/>
+          </p:spPr>
+          <p:txBody>
+            <a:bodyPr wrap="none" rtlCol="0">
+              <a:spAutoFit/>
+            </a:bodyPr>
+            <a:lstStyle/>
+            <a:p>
+              <a:r>
+                <a:rPr lang="en-US" sz="1600" b="1" dirty="0">
+                  <a:solidFill>
+                    <a:schemeClr val="accent2"/>
+                  </a:solidFill>
+                  <a:latin typeface="Calibri" panose="020F0502020204030204" pitchFamily="34" charset="0"/>
+                  <a:cs typeface="Calibri" panose="020F0502020204030204" pitchFamily="34" charset="0"/>
+                </a:rPr>
+                <a:t>ZLRN</a:t>
+              </a:r>
+            </a:p>
+          </p:txBody>
+        </p:sp>
+        <p:pic>
+          <p:nvPicPr>
+            <p:cNvPr id="3" name="Immagine 2" descr="Immagine che contiene schermata, diagramma, Carattere, design&#10;&#10;Il contenuto generato dall'IA potrebbe non essere corretto.">
+              <a:extLst>
+                <a:ext uri="{FF2B5EF4-FFF2-40B4-BE49-F238E27FC236}">
+                  <a16:creationId xmlns:a16="http://schemas.microsoft.com/office/drawing/2014/main" id="{79BBF6D9-D199-6426-915E-D36463833089}"/>
+                </a:ext>
+              </a:extLst>
+            </p:cNvPr>
+            <p:cNvPicPr>
+              <a:picLocks noChangeAspect="1"/>
+            </p:cNvPicPr>
+            <p:nvPr/>
+          </p:nvPicPr>
+          <p:blipFill>
+            <a:blip r:embed="rId4">
+              <a:extLst>
+                <a:ext uri="{28A0092B-C50C-407E-A947-70E740481C1C}">
+                  <a14:useLocalDpi xmlns:a14="http://schemas.microsoft.com/office/drawing/2010/main" val="0"/>
+                </a:ext>
+              </a:extLst>
+            </a:blip>
+            <a:stretch>
+              <a:fillRect/>
+            </a:stretch>
+          </p:blipFill>
+          <p:spPr>
+            <a:xfrm>
+              <a:off x="6422113" y="88738"/>
+              <a:ext cx="3827201" cy="3280458"/>
+            </a:xfrm>
+            <a:prstGeom prst="rect">
+              <a:avLst/>
+            </a:prstGeom>
+          </p:spPr>
+        </p:pic>
+      </p:grpSp>
     </p:spTree>
     <p:extLst>
       <p:ext uri="{BB962C8B-B14F-4D97-AF65-F5344CB8AC3E}">
         <p14:creationId xmlns:p14="http://schemas.microsoft.com/office/powerpoint/2010/main" val="2405710660"/>
+      </p:ext>
+    </p:extLst>
+  </p:cSld>
+  <p:clrMapOvr>
+    <a:masterClrMapping/>
+  </p:clrMapOvr>
+</p:sld>
+</file>
+
+<file path=ppt/slides/slide2.xml><?xml version="1.0" encoding="utf-8"?>
+<p:sld xmlns:a="http://schemas.openxmlformats.org/drawingml/2006/main" xmlns:r="http://schemas.openxmlformats.org/officeDocument/2006/relationships" xmlns:p="http://schemas.openxmlformats.org/presentationml/2006/main">
+  <p:cSld>
+    <p:spTree>
+      <p:nvGrpSpPr>
+        <p:cNvPr id="1" name="">
+          <a:extLst>
+            <a:ext uri="{FF2B5EF4-FFF2-40B4-BE49-F238E27FC236}">
+              <a16:creationId xmlns:a16="http://schemas.microsoft.com/office/drawing/2014/main" id="{F234B4A4-8CE4-BC41-48B4-708EEF7E8E2F}"/>
+            </a:ext>
+          </a:extLst>
+        </p:cNvPr>
+        <p:cNvGrpSpPr/>
+        <p:nvPr/>
+      </p:nvGrpSpPr>
+      <p:grpSpPr>
+        <a:xfrm>
+          <a:off x="0" y="0"/>
+          <a:ext cx="0" cy="0"/>
+          <a:chOff x="0" y="0"/>
+          <a:chExt cx="0" cy="0"/>
+        </a:xfrm>
+      </p:grpSpPr>
+      <p:grpSp>
+        <p:nvGrpSpPr>
+          <p:cNvPr id="12" name="Gruppo 11">
+            <a:extLst>
+              <a:ext uri="{FF2B5EF4-FFF2-40B4-BE49-F238E27FC236}">
+                <a16:creationId xmlns:a16="http://schemas.microsoft.com/office/drawing/2014/main" id="{7BCB940A-4116-2A04-CE48-191FF5DB0ECA}"/>
+              </a:ext>
+            </a:extLst>
+          </p:cNvPr>
+          <p:cNvGrpSpPr/>
+          <p:nvPr/>
+        </p:nvGrpSpPr>
+        <p:grpSpPr>
+          <a:xfrm>
+            <a:off x="289683" y="135490"/>
+            <a:ext cx="11523712" cy="6587019"/>
+            <a:chOff x="289683" y="135490"/>
+            <a:chExt cx="11523712" cy="6587019"/>
+          </a:xfrm>
+        </p:grpSpPr>
+        <p:sp>
+          <p:nvSpPr>
+            <p:cNvPr id="4" name="TextBox 21">
+              <a:extLst>
+                <a:ext uri="{FF2B5EF4-FFF2-40B4-BE49-F238E27FC236}">
+                  <a16:creationId xmlns:a16="http://schemas.microsoft.com/office/drawing/2014/main" id="{34F6909E-EDC4-191D-3CAE-C9B5B918EDF0}"/>
+                </a:ext>
+              </a:extLst>
+            </p:cNvPr>
+            <p:cNvSpPr txBox="1"/>
+            <p:nvPr/>
+          </p:nvSpPr>
+          <p:spPr>
+            <a:xfrm>
+              <a:off x="289683" y="135580"/>
+              <a:ext cx="370614" cy="461665"/>
+            </a:xfrm>
+            <a:prstGeom prst="rect">
+              <a:avLst/>
+            </a:prstGeom>
+            <a:noFill/>
+          </p:spPr>
+          <p:txBody>
+            <a:bodyPr wrap="none" rtlCol="0">
+              <a:spAutoFit/>
+            </a:bodyPr>
+            <a:lstStyle/>
+            <a:p>
+              <a:r>
+                <a:rPr lang="en-US" sz="2400" b="1" dirty="0">
+                  <a:latin typeface="Calibri" panose="020F0502020204030204" pitchFamily="34" charset="0"/>
+                  <a:cs typeface="Calibri" panose="020F0502020204030204" pitchFamily="34" charset="0"/>
+                </a:rPr>
+                <a:t>A</a:t>
+              </a:r>
+            </a:p>
+          </p:txBody>
+        </p:sp>
+        <p:sp>
+          <p:nvSpPr>
+            <p:cNvPr id="5" name="TextBox 22">
+              <a:extLst>
+                <a:ext uri="{FF2B5EF4-FFF2-40B4-BE49-F238E27FC236}">
+                  <a16:creationId xmlns:a16="http://schemas.microsoft.com/office/drawing/2014/main" id="{23546E3F-4675-BA4B-C010-9B4A235F9370}"/>
+                </a:ext>
+              </a:extLst>
+            </p:cNvPr>
+            <p:cNvSpPr txBox="1"/>
+            <p:nvPr/>
+          </p:nvSpPr>
+          <p:spPr>
+            <a:xfrm>
+              <a:off x="1545725" y="3483092"/>
+              <a:ext cx="378630" cy="461665"/>
+            </a:xfrm>
+            <a:prstGeom prst="rect">
+              <a:avLst/>
+            </a:prstGeom>
+            <a:noFill/>
+          </p:spPr>
+          <p:txBody>
+            <a:bodyPr wrap="none" rtlCol="0">
+              <a:spAutoFit/>
+            </a:bodyPr>
+            <a:lstStyle/>
+            <a:p>
+              <a:r>
+                <a:rPr lang="en-US" sz="2400" b="1" dirty="0">
+                  <a:latin typeface="Calibri" panose="020F0502020204030204" pitchFamily="34" charset="0"/>
+                  <a:cs typeface="Calibri" panose="020F0502020204030204" pitchFamily="34" charset="0"/>
+                </a:rPr>
+                <a:t>D</a:t>
+              </a:r>
+            </a:p>
+          </p:txBody>
+        </p:sp>
+        <p:sp>
+          <p:nvSpPr>
+            <p:cNvPr id="6" name="TextBox 6">
+              <a:extLst>
+                <a:ext uri="{FF2B5EF4-FFF2-40B4-BE49-F238E27FC236}">
+                  <a16:creationId xmlns:a16="http://schemas.microsoft.com/office/drawing/2014/main" id="{0D18F3EB-5866-F2D5-7069-274DE8B272CB}"/>
+                </a:ext>
+              </a:extLst>
+            </p:cNvPr>
+            <p:cNvSpPr txBox="1"/>
+            <p:nvPr/>
+          </p:nvSpPr>
+          <p:spPr>
+            <a:xfrm>
+              <a:off x="6310536" y="3483002"/>
+              <a:ext cx="335348" cy="461665"/>
+            </a:xfrm>
+            <a:prstGeom prst="rect">
+              <a:avLst/>
+            </a:prstGeom>
+            <a:noFill/>
+          </p:spPr>
+          <p:txBody>
+            <a:bodyPr wrap="none" rtlCol="0">
+              <a:spAutoFit/>
+            </a:bodyPr>
+            <a:lstStyle/>
+            <a:p>
+              <a:r>
+                <a:rPr lang="en-US" sz="2400" b="1" dirty="0">
+                  <a:latin typeface="Calibri" panose="020F0502020204030204" pitchFamily="34" charset="0"/>
+                  <a:cs typeface="Calibri" panose="020F0502020204030204" pitchFamily="34" charset="0"/>
+                </a:rPr>
+                <a:t>E</a:t>
+              </a:r>
+            </a:p>
+          </p:txBody>
+        </p:sp>
+        <p:sp>
+          <p:nvSpPr>
+            <p:cNvPr id="7" name="TextBox 7">
+              <a:extLst>
+                <a:ext uri="{FF2B5EF4-FFF2-40B4-BE49-F238E27FC236}">
+                  <a16:creationId xmlns:a16="http://schemas.microsoft.com/office/drawing/2014/main" id="{337A6729-730B-F189-FE64-39FEC2CF358F}"/>
+                </a:ext>
+              </a:extLst>
+            </p:cNvPr>
+            <p:cNvSpPr txBox="1"/>
+            <p:nvPr/>
+          </p:nvSpPr>
+          <p:spPr>
+            <a:xfrm>
+              <a:off x="4530407" y="135491"/>
+              <a:ext cx="357790" cy="461665"/>
+            </a:xfrm>
+            <a:prstGeom prst="rect">
+              <a:avLst/>
+            </a:prstGeom>
+            <a:noFill/>
+          </p:spPr>
+          <p:txBody>
+            <a:bodyPr wrap="none" rtlCol="0">
+              <a:spAutoFit/>
+            </a:bodyPr>
+            <a:lstStyle/>
+            <a:p>
+              <a:r>
+                <a:rPr lang="en-US" sz="2400" b="1" dirty="0">
+                  <a:latin typeface="Calibri" panose="020F0502020204030204" pitchFamily="34" charset="0"/>
+                  <a:cs typeface="Calibri" panose="020F0502020204030204" pitchFamily="34" charset="0"/>
+                </a:rPr>
+                <a:t>B</a:t>
+              </a:r>
+            </a:p>
+          </p:txBody>
+        </p:sp>
+        <p:sp>
+          <p:nvSpPr>
+            <p:cNvPr id="31" name="CasellaDiTesto 30">
+              <a:extLst>
+                <a:ext uri="{FF2B5EF4-FFF2-40B4-BE49-F238E27FC236}">
+                  <a16:creationId xmlns:a16="http://schemas.microsoft.com/office/drawing/2014/main" id="{901DB0F4-03F3-AC93-F30B-5DF07D54579C}"/>
+                </a:ext>
+              </a:extLst>
+            </p:cNvPr>
+            <p:cNvSpPr txBox="1"/>
+            <p:nvPr/>
+          </p:nvSpPr>
+          <p:spPr>
+            <a:xfrm>
+              <a:off x="908327" y="454782"/>
+              <a:ext cx="825867" cy="400110"/>
+            </a:xfrm>
+            <a:prstGeom prst="rect">
+              <a:avLst/>
+            </a:prstGeom>
+            <a:noFill/>
+          </p:spPr>
+          <p:txBody>
+            <a:bodyPr wrap="none" rtlCol="0">
+              <a:spAutoFit/>
+            </a:bodyPr>
+            <a:lstStyle/>
+            <a:p>
+              <a:r>
+                <a:rPr lang="en-US" sz="2000" b="1" dirty="0">
+                  <a:latin typeface="Calibri" panose="020F0502020204030204" pitchFamily="34" charset="0"/>
+                  <a:cs typeface="Calibri" panose="020F0502020204030204" pitchFamily="34" charset="0"/>
+                </a:rPr>
+                <a:t>F</a:t>
+              </a:r>
+              <a:r>
+                <a:rPr lang="en-US" sz="2000" dirty="0">
+                  <a:latin typeface="Calibri" panose="020F0502020204030204" pitchFamily="34" charset="0"/>
+                  <a:cs typeface="Calibri" panose="020F0502020204030204" pitchFamily="34" charset="0"/>
+                </a:rPr>
+                <a:t> AXIS</a:t>
+              </a:r>
+            </a:p>
+          </p:txBody>
+        </p:sp>
+        <p:sp>
+          <p:nvSpPr>
+            <p:cNvPr id="32" name="CasellaDiTesto 31">
+              <a:extLst>
+                <a:ext uri="{FF2B5EF4-FFF2-40B4-BE49-F238E27FC236}">
+                  <a16:creationId xmlns:a16="http://schemas.microsoft.com/office/drawing/2014/main" id="{9695D88A-5065-F387-717A-8046F0DE4F68}"/>
+                </a:ext>
+              </a:extLst>
+            </p:cNvPr>
+            <p:cNvSpPr txBox="1"/>
+            <p:nvPr/>
+          </p:nvSpPr>
+          <p:spPr>
+            <a:xfrm>
+              <a:off x="2537838" y="457689"/>
+              <a:ext cx="825867" cy="400110"/>
+            </a:xfrm>
+            <a:prstGeom prst="rect">
+              <a:avLst/>
+            </a:prstGeom>
+            <a:noFill/>
+          </p:spPr>
+          <p:txBody>
+            <a:bodyPr wrap="none" rtlCol="0">
+              <a:spAutoFit/>
+            </a:bodyPr>
+            <a:lstStyle/>
+            <a:p>
+              <a:r>
+                <a:rPr lang="en-US" sz="2000" b="1" dirty="0">
+                  <a:latin typeface="Calibri" panose="020F0502020204030204" pitchFamily="34" charset="0"/>
+                  <a:cs typeface="Calibri" panose="020F0502020204030204" pitchFamily="34" charset="0"/>
+                </a:rPr>
+                <a:t>L </a:t>
+              </a:r>
+              <a:r>
+                <a:rPr lang="en-US" sz="2000" dirty="0">
+                  <a:latin typeface="Calibri" panose="020F0502020204030204" pitchFamily="34" charset="0"/>
+                  <a:cs typeface="Calibri" panose="020F0502020204030204" pitchFamily="34" charset="0"/>
+                </a:rPr>
+                <a:t>AXIS</a:t>
+              </a:r>
+            </a:p>
+          </p:txBody>
+        </p:sp>
+        <p:pic>
+          <p:nvPicPr>
+            <p:cNvPr id="37" name="Immagine 36" descr="Immagine che contiene testo, schermata, Carattere, design&#10;&#10;Il contenuto generato dall'IA potrebbe non essere corretto.">
+              <a:extLst>
+                <a:ext uri="{FF2B5EF4-FFF2-40B4-BE49-F238E27FC236}">
+                  <a16:creationId xmlns:a16="http://schemas.microsoft.com/office/drawing/2014/main" id="{914CD91B-28AA-A161-E82D-51B61140919D}"/>
+                </a:ext>
+              </a:extLst>
+            </p:cNvPr>
+            <p:cNvPicPr>
+              <a:picLocks noChangeAspect="1"/>
+            </p:cNvPicPr>
+            <p:nvPr/>
+          </p:nvPicPr>
+          <p:blipFill>
+            <a:blip r:embed="rId2">
+              <a:extLst>
+                <a:ext uri="{28A0092B-C50C-407E-A947-70E740481C1C}">
+                  <a14:useLocalDpi xmlns:a14="http://schemas.microsoft.com/office/drawing/2010/main" val="0"/>
+                </a:ext>
+              </a:extLst>
+            </a:blip>
+            <a:srcRect l="6311"/>
+            <a:stretch>
+              <a:fillRect/>
+            </a:stretch>
+          </p:blipFill>
+          <p:spPr>
+            <a:xfrm>
+              <a:off x="2214005" y="3877818"/>
+              <a:ext cx="3418843" cy="2606528"/>
+            </a:xfrm>
+            <a:prstGeom prst="rect">
+              <a:avLst/>
+            </a:prstGeom>
+          </p:spPr>
+        </p:pic>
+        <p:pic>
+          <p:nvPicPr>
+            <p:cNvPr id="39" name="Immagine 38" descr="Immagine che contiene testo, schermata, bianco e nero&#10;&#10;Il contenuto generato dall'IA potrebbe non essere corretto.">
+              <a:extLst>
+                <a:ext uri="{FF2B5EF4-FFF2-40B4-BE49-F238E27FC236}">
+                  <a16:creationId xmlns:a16="http://schemas.microsoft.com/office/drawing/2014/main" id="{1FB5B024-1399-F8F8-2E61-B2207E07DDC4}"/>
+                </a:ext>
+              </a:extLst>
+            </p:cNvPr>
+            <p:cNvPicPr>
+              <a:picLocks noChangeAspect="1"/>
+            </p:cNvPicPr>
+            <p:nvPr/>
+          </p:nvPicPr>
+          <p:blipFill>
+            <a:blip r:embed="rId3">
+              <a:extLst>
+                <a:ext uri="{28A0092B-C50C-407E-A947-70E740481C1C}">
+                  <a14:useLocalDpi xmlns:a14="http://schemas.microsoft.com/office/drawing/2010/main" val="0"/>
+                </a:ext>
+              </a:extLst>
+            </a:blip>
+            <a:srcRect l="9354"/>
+            <a:stretch>
+              <a:fillRect/>
+            </a:stretch>
+          </p:blipFill>
+          <p:spPr>
+            <a:xfrm>
+              <a:off x="7300128" y="3814229"/>
+              <a:ext cx="3610186" cy="2844805"/>
+            </a:xfrm>
+            <a:prstGeom prst="rect">
+              <a:avLst/>
+            </a:prstGeom>
+          </p:spPr>
+        </p:pic>
+        <p:pic>
+          <p:nvPicPr>
+            <p:cNvPr id="42" name="Immagine 41" descr="Immagine che contiene testo, schermata, bianco e nero&#10;&#10;Il contenuto generato dall'IA potrebbe non essere corretto.">
+              <a:extLst>
+                <a:ext uri="{FF2B5EF4-FFF2-40B4-BE49-F238E27FC236}">
+                  <a16:creationId xmlns:a16="http://schemas.microsoft.com/office/drawing/2014/main" id="{7B9FFFDF-8BC0-BC39-4CC1-CED5EAD0AE43}"/>
+                </a:ext>
+              </a:extLst>
+            </p:cNvPr>
+            <p:cNvPicPr>
+              <a:picLocks noChangeAspect="1"/>
+            </p:cNvPicPr>
+            <p:nvPr/>
+          </p:nvPicPr>
+          <p:blipFill>
+            <a:blip r:embed="rId3">
+              <a:extLst>
+                <a:ext uri="{28A0092B-C50C-407E-A947-70E740481C1C}">
+                  <a14:useLocalDpi xmlns:a14="http://schemas.microsoft.com/office/drawing/2010/main" val="0"/>
+                </a:ext>
+              </a:extLst>
+            </a:blip>
+            <a:srcRect r="90221"/>
+            <a:stretch>
+              <a:fillRect/>
+            </a:stretch>
+          </p:blipFill>
+          <p:spPr>
+            <a:xfrm>
+              <a:off x="1682810" y="3877704"/>
+              <a:ext cx="389474" cy="2844805"/>
+            </a:xfrm>
+            <a:prstGeom prst="rect">
+              <a:avLst/>
+            </a:prstGeom>
+          </p:spPr>
+        </p:pic>
+        <p:pic>
+          <p:nvPicPr>
+            <p:cNvPr id="43" name="Immagine 42" descr="Immagine che contiene testo, schermata, bianco e nero&#10;&#10;Il contenuto generato dall'IA potrebbe non essere corretto.">
+              <a:extLst>
+                <a:ext uri="{FF2B5EF4-FFF2-40B4-BE49-F238E27FC236}">
+                  <a16:creationId xmlns:a16="http://schemas.microsoft.com/office/drawing/2014/main" id="{FC900FB2-2E19-1E9B-04EE-EDFFBC73A8AA}"/>
+                </a:ext>
+              </a:extLst>
+            </p:cNvPr>
+            <p:cNvPicPr>
+              <a:picLocks noChangeAspect="1"/>
+            </p:cNvPicPr>
+            <p:nvPr/>
+          </p:nvPicPr>
+          <p:blipFill>
+            <a:blip r:embed="rId3">
+              <a:extLst>
+                <a:ext uri="{28A0092B-C50C-407E-A947-70E740481C1C}">
+                  <a14:useLocalDpi xmlns:a14="http://schemas.microsoft.com/office/drawing/2010/main" val="0"/>
+                </a:ext>
+              </a:extLst>
+            </a:blip>
+            <a:srcRect r="90221"/>
+            <a:stretch>
+              <a:fillRect/>
+            </a:stretch>
+          </p:blipFill>
+          <p:spPr>
+            <a:xfrm>
+              <a:off x="6741885" y="3758590"/>
+              <a:ext cx="389474" cy="2844805"/>
+            </a:xfrm>
+            <a:prstGeom prst="rect">
+              <a:avLst/>
+            </a:prstGeom>
+          </p:spPr>
+        </p:pic>
+        <p:cxnSp>
+          <p:nvCxnSpPr>
+            <p:cNvPr id="33" name="Connettore 2 32">
+              <a:extLst>
+                <a:ext uri="{FF2B5EF4-FFF2-40B4-BE49-F238E27FC236}">
+                  <a16:creationId xmlns:a16="http://schemas.microsoft.com/office/drawing/2014/main" id="{1083F531-F266-281D-54C2-525FF6648683}"/>
+                </a:ext>
+              </a:extLst>
+            </p:cNvPr>
+            <p:cNvCxnSpPr/>
+            <p:nvPr/>
+          </p:nvCxnSpPr>
+          <p:spPr>
+            <a:xfrm flipV="1">
+              <a:off x="1241598" y="993359"/>
+              <a:ext cx="0" cy="1731258"/>
+            </a:xfrm>
+            <a:prstGeom prst="straightConnector1">
+              <a:avLst/>
+            </a:prstGeom>
+            <a:ln w="28575">
+              <a:tailEnd type="triangle"/>
+            </a:ln>
+          </p:spPr>
+          <p:style>
+            <a:lnRef idx="2">
+              <a:schemeClr val="dk1"/>
+            </a:lnRef>
+            <a:fillRef idx="0">
+              <a:schemeClr val="dk1"/>
+            </a:fillRef>
+            <a:effectRef idx="1">
+              <a:schemeClr val="dk1"/>
+            </a:effectRef>
+            <a:fontRef idx="minor">
+              <a:schemeClr val="tx1"/>
+            </a:fontRef>
+          </p:style>
+        </p:cxnSp>
+        <p:sp>
+          <p:nvSpPr>
+            <p:cNvPr id="44" name="Ovale 43">
+              <a:extLst>
+                <a:ext uri="{FF2B5EF4-FFF2-40B4-BE49-F238E27FC236}">
+                  <a16:creationId xmlns:a16="http://schemas.microsoft.com/office/drawing/2014/main" id="{6D75417F-6418-B305-6E61-FDCF507A4647}"/>
+                </a:ext>
+              </a:extLst>
+            </p:cNvPr>
+            <p:cNvSpPr/>
+            <p:nvPr/>
+          </p:nvSpPr>
+          <p:spPr>
+            <a:xfrm>
+              <a:off x="1152826" y="1308053"/>
+              <a:ext cx="177543" cy="166977"/>
+            </a:xfrm>
+            <a:prstGeom prst="ellipse">
+              <a:avLst/>
+            </a:prstGeom>
+            <a:solidFill>
+              <a:srgbClr val="0070C0"/>
+            </a:solidFill>
+            <a:ln>
+              <a:noFill/>
+            </a:ln>
+          </p:spPr>
+          <p:style>
+            <a:lnRef idx="2">
+              <a:schemeClr val="accent1">
+                <a:shade val="15000"/>
+              </a:schemeClr>
+            </a:lnRef>
+            <a:fillRef idx="1">
+              <a:schemeClr val="accent1"/>
+            </a:fillRef>
+            <a:effectRef idx="0">
+              <a:schemeClr val="accent1"/>
+            </a:effectRef>
+            <a:fontRef idx="minor">
+              <a:schemeClr val="lt1"/>
+            </a:fontRef>
+          </p:style>
+          <p:txBody>
+            <a:bodyPr rtlCol="0" anchor="ctr"/>
+            <a:lstStyle/>
+            <a:p>
+              <a:pPr algn="ctr"/>
+              <a:endParaRPr lang="en-US"/>
+            </a:p>
+          </p:txBody>
+        </p:sp>
+        <p:sp>
+          <p:nvSpPr>
+            <p:cNvPr id="46" name="Ovale 45">
+              <a:extLst>
+                <a:ext uri="{FF2B5EF4-FFF2-40B4-BE49-F238E27FC236}">
+                  <a16:creationId xmlns:a16="http://schemas.microsoft.com/office/drawing/2014/main" id="{7D75ED23-7F0B-636F-FDEF-C458BF6102CA}"/>
+                </a:ext>
+              </a:extLst>
+            </p:cNvPr>
+            <p:cNvSpPr/>
+            <p:nvPr/>
+          </p:nvSpPr>
+          <p:spPr>
+            <a:xfrm>
+              <a:off x="1152826" y="2378765"/>
+              <a:ext cx="177543" cy="166977"/>
+            </a:xfrm>
+            <a:prstGeom prst="ellipse">
+              <a:avLst/>
+            </a:prstGeom>
+            <a:solidFill>
+              <a:schemeClr val="accent2"/>
+            </a:solidFill>
+            <a:ln>
+              <a:noFill/>
+            </a:ln>
+          </p:spPr>
+          <p:style>
+            <a:lnRef idx="2">
+              <a:schemeClr val="accent1">
+                <a:shade val="15000"/>
+              </a:schemeClr>
+            </a:lnRef>
+            <a:fillRef idx="1">
+              <a:schemeClr val="accent1"/>
+            </a:fillRef>
+            <a:effectRef idx="0">
+              <a:schemeClr val="accent1"/>
+            </a:effectRef>
+            <a:fontRef idx="minor">
+              <a:schemeClr val="lt1"/>
+            </a:fontRef>
+          </p:style>
+          <p:txBody>
+            <a:bodyPr rtlCol="0" anchor="ctr"/>
+            <a:lstStyle/>
+            <a:p>
+              <a:pPr algn="ctr"/>
+              <a:endParaRPr lang="en-US" dirty="0"/>
+            </a:p>
+          </p:txBody>
+        </p:sp>
+        <p:cxnSp>
+          <p:nvCxnSpPr>
+            <p:cNvPr id="49" name="Connettore diritto 48">
+              <a:extLst>
+                <a:ext uri="{FF2B5EF4-FFF2-40B4-BE49-F238E27FC236}">
+                  <a16:creationId xmlns:a16="http://schemas.microsoft.com/office/drawing/2014/main" id="{24C62D84-FE70-8551-5F11-8E0D2B86AEB4}"/>
+                </a:ext>
+              </a:extLst>
+            </p:cNvPr>
+            <p:cNvCxnSpPr/>
+            <p:nvPr/>
+          </p:nvCxnSpPr>
+          <p:spPr>
+            <a:xfrm>
+              <a:off x="1156802" y="1908607"/>
+              <a:ext cx="177543" cy="0"/>
+            </a:xfrm>
+            <a:prstGeom prst="line">
+              <a:avLst/>
+            </a:prstGeom>
+          </p:spPr>
+          <p:style>
+            <a:lnRef idx="2">
+              <a:schemeClr val="dk1"/>
+            </a:lnRef>
+            <a:fillRef idx="0">
+              <a:schemeClr val="dk1"/>
+            </a:fillRef>
+            <a:effectRef idx="1">
+              <a:schemeClr val="dk1"/>
+            </a:effectRef>
+            <a:fontRef idx="minor">
+              <a:schemeClr val="tx1"/>
+            </a:fontRef>
+          </p:style>
+        </p:cxnSp>
+        <p:sp>
+          <p:nvSpPr>
+            <p:cNvPr id="50" name="CasellaDiTesto 49">
+              <a:extLst>
+                <a:ext uri="{FF2B5EF4-FFF2-40B4-BE49-F238E27FC236}">
+                  <a16:creationId xmlns:a16="http://schemas.microsoft.com/office/drawing/2014/main" id="{3573A9C1-8E38-4DDA-34E3-03F08B54A105}"/>
+                </a:ext>
+              </a:extLst>
+            </p:cNvPr>
+            <p:cNvSpPr txBox="1"/>
+            <p:nvPr/>
+          </p:nvSpPr>
+          <p:spPr>
+            <a:xfrm>
+              <a:off x="754278" y="854892"/>
+              <a:ext cx="308098" cy="369332"/>
+            </a:xfrm>
+            <a:prstGeom prst="rect">
+              <a:avLst/>
+            </a:prstGeom>
+            <a:noFill/>
+          </p:spPr>
+          <p:txBody>
+            <a:bodyPr wrap="none" rtlCol="0">
+              <a:spAutoFit/>
+            </a:bodyPr>
+            <a:lstStyle/>
+            <a:p>
+              <a:r>
+                <a:rPr lang="en-US" dirty="0"/>
+                <a:t>+</a:t>
+              </a:r>
+            </a:p>
+          </p:txBody>
+        </p:sp>
+        <p:sp>
+          <p:nvSpPr>
+            <p:cNvPr id="51" name="CasellaDiTesto 50">
+              <a:extLst>
+                <a:ext uri="{FF2B5EF4-FFF2-40B4-BE49-F238E27FC236}">
+                  <a16:creationId xmlns:a16="http://schemas.microsoft.com/office/drawing/2014/main" id="{838D3065-3EDB-3AC5-4A9F-56A2DFB5AF72}"/>
+                </a:ext>
+              </a:extLst>
+            </p:cNvPr>
+            <p:cNvSpPr txBox="1"/>
+            <p:nvPr/>
+          </p:nvSpPr>
+          <p:spPr>
+            <a:xfrm>
+              <a:off x="759872" y="2454302"/>
+              <a:ext cx="263214" cy="369332"/>
+            </a:xfrm>
+            <a:prstGeom prst="rect">
+              <a:avLst/>
+            </a:prstGeom>
+            <a:noFill/>
+          </p:spPr>
+          <p:txBody>
+            <a:bodyPr wrap="none" rtlCol="0">
+              <a:spAutoFit/>
+            </a:bodyPr>
+            <a:lstStyle/>
+            <a:p>
+              <a:r>
+                <a:rPr lang="en-US" dirty="0"/>
+                <a:t>-</a:t>
+              </a:r>
+            </a:p>
+          </p:txBody>
+        </p:sp>
+        <p:cxnSp>
+          <p:nvCxnSpPr>
+            <p:cNvPr id="54" name="Connettore 2 53">
+              <a:extLst>
+                <a:ext uri="{FF2B5EF4-FFF2-40B4-BE49-F238E27FC236}">
+                  <a16:creationId xmlns:a16="http://schemas.microsoft.com/office/drawing/2014/main" id="{E8FDDA1E-9CAD-5DBD-FADB-E089C6F32834}"/>
+                </a:ext>
+              </a:extLst>
+            </p:cNvPr>
+            <p:cNvCxnSpPr/>
+            <p:nvPr/>
+          </p:nvCxnSpPr>
+          <p:spPr>
+            <a:xfrm flipV="1">
+              <a:off x="2954887" y="993359"/>
+              <a:ext cx="0" cy="1731258"/>
+            </a:xfrm>
+            <a:prstGeom prst="straightConnector1">
+              <a:avLst/>
+            </a:prstGeom>
+            <a:ln w="28575">
+              <a:tailEnd type="triangle"/>
+            </a:ln>
+          </p:spPr>
+          <p:style>
+            <a:lnRef idx="2">
+              <a:schemeClr val="dk1"/>
+            </a:lnRef>
+            <a:fillRef idx="0">
+              <a:schemeClr val="dk1"/>
+            </a:fillRef>
+            <a:effectRef idx="1">
+              <a:schemeClr val="dk1"/>
+            </a:effectRef>
+            <a:fontRef idx="minor">
+              <a:schemeClr val="tx1"/>
+            </a:fontRef>
+          </p:style>
+        </p:cxnSp>
+        <p:sp>
+          <p:nvSpPr>
+            <p:cNvPr id="55" name="Ovale 54">
+              <a:extLst>
+                <a:ext uri="{FF2B5EF4-FFF2-40B4-BE49-F238E27FC236}">
+                  <a16:creationId xmlns:a16="http://schemas.microsoft.com/office/drawing/2014/main" id="{62109FD2-67E4-EC27-4E7F-2BB34DCB953D}"/>
+                </a:ext>
+              </a:extLst>
+            </p:cNvPr>
+            <p:cNvSpPr/>
+            <p:nvPr/>
+          </p:nvSpPr>
+          <p:spPr>
+            <a:xfrm>
+              <a:off x="2866115" y="1311966"/>
+              <a:ext cx="177543" cy="166977"/>
+            </a:xfrm>
+            <a:prstGeom prst="ellipse">
+              <a:avLst/>
+            </a:prstGeom>
+            <a:solidFill>
+              <a:schemeClr val="accent2"/>
+            </a:solidFill>
+            <a:ln>
+              <a:noFill/>
+            </a:ln>
+          </p:spPr>
+          <p:style>
+            <a:lnRef idx="2">
+              <a:schemeClr val="accent1">
+                <a:shade val="15000"/>
+              </a:schemeClr>
+            </a:lnRef>
+            <a:fillRef idx="1">
+              <a:schemeClr val="accent1"/>
+            </a:fillRef>
+            <a:effectRef idx="0">
+              <a:schemeClr val="accent1"/>
+            </a:effectRef>
+            <a:fontRef idx="minor">
+              <a:schemeClr val="lt1"/>
+            </a:fontRef>
+          </p:style>
+          <p:txBody>
+            <a:bodyPr rtlCol="0" anchor="ctr"/>
+            <a:lstStyle/>
+            <a:p>
+              <a:pPr algn="ctr"/>
+              <a:endParaRPr lang="en-US" dirty="0"/>
+            </a:p>
+          </p:txBody>
+        </p:sp>
+        <p:sp>
+          <p:nvSpPr>
+            <p:cNvPr id="56" name="Ovale 55">
+              <a:extLst>
+                <a:ext uri="{FF2B5EF4-FFF2-40B4-BE49-F238E27FC236}">
+                  <a16:creationId xmlns:a16="http://schemas.microsoft.com/office/drawing/2014/main" id="{0550E024-3494-CC4C-1EA3-33ECF3833982}"/>
+                </a:ext>
+              </a:extLst>
+            </p:cNvPr>
+            <p:cNvSpPr/>
+            <p:nvPr/>
+          </p:nvSpPr>
+          <p:spPr>
+            <a:xfrm>
+              <a:off x="2866115" y="2378765"/>
+              <a:ext cx="177543" cy="166977"/>
+            </a:xfrm>
+            <a:prstGeom prst="ellipse">
+              <a:avLst/>
+            </a:prstGeom>
+            <a:solidFill>
+              <a:srgbClr val="0070C0"/>
+            </a:solidFill>
+            <a:ln>
+              <a:noFill/>
+            </a:ln>
+          </p:spPr>
+          <p:style>
+            <a:lnRef idx="2">
+              <a:schemeClr val="accent1">
+                <a:shade val="15000"/>
+              </a:schemeClr>
+            </a:lnRef>
+            <a:fillRef idx="1">
+              <a:schemeClr val="accent1"/>
+            </a:fillRef>
+            <a:effectRef idx="0">
+              <a:schemeClr val="accent1"/>
+            </a:effectRef>
+            <a:fontRef idx="minor">
+              <a:schemeClr val="lt1"/>
+            </a:fontRef>
+          </p:style>
+          <p:txBody>
+            <a:bodyPr rtlCol="0" anchor="ctr"/>
+            <a:lstStyle/>
+            <a:p>
+              <a:pPr algn="ctr"/>
+              <a:endParaRPr lang="en-US"/>
+            </a:p>
+          </p:txBody>
+        </p:sp>
+        <p:cxnSp>
+          <p:nvCxnSpPr>
+            <p:cNvPr id="57" name="Connettore diritto 56">
+              <a:extLst>
+                <a:ext uri="{FF2B5EF4-FFF2-40B4-BE49-F238E27FC236}">
+                  <a16:creationId xmlns:a16="http://schemas.microsoft.com/office/drawing/2014/main" id="{1778F5F1-976E-1A25-3FA9-2F5226363D66}"/>
+                </a:ext>
+              </a:extLst>
+            </p:cNvPr>
+            <p:cNvCxnSpPr/>
+            <p:nvPr/>
+          </p:nvCxnSpPr>
+          <p:spPr>
+            <a:xfrm>
+              <a:off x="2870091" y="1908607"/>
+              <a:ext cx="177543" cy="0"/>
+            </a:xfrm>
+            <a:prstGeom prst="line">
+              <a:avLst/>
+            </a:prstGeom>
+          </p:spPr>
+          <p:style>
+            <a:lnRef idx="2">
+              <a:schemeClr val="dk1"/>
+            </a:lnRef>
+            <a:fillRef idx="0">
+              <a:schemeClr val="dk1"/>
+            </a:fillRef>
+            <a:effectRef idx="1">
+              <a:schemeClr val="dk1"/>
+            </a:effectRef>
+            <a:fontRef idx="minor">
+              <a:schemeClr val="tx1"/>
+            </a:fontRef>
+          </p:style>
+        </p:cxnSp>
+        <p:sp>
+          <p:nvSpPr>
+            <p:cNvPr id="58" name="CasellaDiTesto 57">
+              <a:extLst>
+                <a:ext uri="{FF2B5EF4-FFF2-40B4-BE49-F238E27FC236}">
+                  <a16:creationId xmlns:a16="http://schemas.microsoft.com/office/drawing/2014/main" id="{CB89D250-5F83-D336-6758-F5208457754E}"/>
+                </a:ext>
+              </a:extLst>
+            </p:cNvPr>
+            <p:cNvSpPr txBox="1"/>
+            <p:nvPr/>
+          </p:nvSpPr>
+          <p:spPr>
+            <a:xfrm>
+              <a:off x="2467567" y="854892"/>
+              <a:ext cx="308098" cy="369332"/>
+            </a:xfrm>
+            <a:prstGeom prst="rect">
+              <a:avLst/>
+            </a:prstGeom>
+            <a:noFill/>
+          </p:spPr>
+          <p:txBody>
+            <a:bodyPr wrap="none" rtlCol="0">
+              <a:spAutoFit/>
+            </a:bodyPr>
+            <a:lstStyle/>
+            <a:p>
+              <a:r>
+                <a:rPr lang="en-US" dirty="0"/>
+                <a:t>+</a:t>
+              </a:r>
+            </a:p>
+          </p:txBody>
+        </p:sp>
+        <p:sp>
+          <p:nvSpPr>
+            <p:cNvPr id="59" name="CasellaDiTesto 58">
+              <a:extLst>
+                <a:ext uri="{FF2B5EF4-FFF2-40B4-BE49-F238E27FC236}">
+                  <a16:creationId xmlns:a16="http://schemas.microsoft.com/office/drawing/2014/main" id="{CB87DBED-ABE7-D469-E1A2-ABFDCBBC495E}"/>
+                </a:ext>
+              </a:extLst>
+            </p:cNvPr>
+            <p:cNvSpPr txBox="1"/>
+            <p:nvPr/>
+          </p:nvSpPr>
+          <p:spPr>
+            <a:xfrm>
+              <a:off x="2473161" y="2454302"/>
+              <a:ext cx="263214" cy="369332"/>
+            </a:xfrm>
+            <a:prstGeom prst="rect">
+              <a:avLst/>
+            </a:prstGeom>
+            <a:noFill/>
+          </p:spPr>
+          <p:txBody>
+            <a:bodyPr wrap="none" rtlCol="0">
+              <a:spAutoFit/>
+            </a:bodyPr>
+            <a:lstStyle/>
+            <a:p>
+              <a:r>
+                <a:rPr lang="en-US" dirty="0"/>
+                <a:t>-</a:t>
+              </a:r>
+            </a:p>
+          </p:txBody>
+        </p:sp>
+        <p:sp>
+          <p:nvSpPr>
+            <p:cNvPr id="60" name="CasellaDiTesto 59">
+              <a:extLst>
+                <a:ext uri="{FF2B5EF4-FFF2-40B4-BE49-F238E27FC236}">
+                  <a16:creationId xmlns:a16="http://schemas.microsoft.com/office/drawing/2014/main" id="{A9E93BFA-3D03-C64B-4D1F-3792D7EC3394}"/>
+                </a:ext>
+              </a:extLst>
+            </p:cNvPr>
+            <p:cNvSpPr txBox="1"/>
+            <p:nvPr/>
+          </p:nvSpPr>
+          <p:spPr>
+            <a:xfrm>
+              <a:off x="1453307" y="1224224"/>
+              <a:ext cx="617477" cy="338554"/>
+            </a:xfrm>
+            <a:prstGeom prst="rect">
+              <a:avLst/>
+            </a:prstGeom>
+            <a:noFill/>
+          </p:spPr>
+          <p:txBody>
+            <a:bodyPr wrap="none" rtlCol="0">
+              <a:spAutoFit/>
+            </a:bodyPr>
+            <a:lstStyle/>
+            <a:p>
+              <a:r>
+                <a:rPr lang="en-US" sz="1600" b="1" dirty="0">
+                  <a:solidFill>
+                    <a:srgbClr val="0070C0"/>
+                  </a:solidFill>
+                  <a:latin typeface="Calibri" panose="020F0502020204030204" pitchFamily="34" charset="0"/>
+                  <a:cs typeface="Calibri" panose="020F0502020204030204" pitchFamily="34" charset="0"/>
+                </a:rPr>
+                <a:t>FTVR</a:t>
+              </a:r>
+            </a:p>
+          </p:txBody>
+        </p:sp>
+        <p:sp>
+          <p:nvSpPr>
+            <p:cNvPr id="61" name="CasellaDiTesto 60">
+              <a:extLst>
+                <a:ext uri="{FF2B5EF4-FFF2-40B4-BE49-F238E27FC236}">
+                  <a16:creationId xmlns:a16="http://schemas.microsoft.com/office/drawing/2014/main" id="{874E8AEE-DE5A-53DB-E46A-FFD38BABE855}"/>
+                </a:ext>
+              </a:extLst>
+            </p:cNvPr>
+            <p:cNvSpPr txBox="1"/>
+            <p:nvPr/>
+          </p:nvSpPr>
+          <p:spPr>
+            <a:xfrm>
+              <a:off x="3229052" y="2277587"/>
+              <a:ext cx="617477" cy="338554"/>
+            </a:xfrm>
+            <a:prstGeom prst="rect">
+              <a:avLst/>
+            </a:prstGeom>
+            <a:noFill/>
+          </p:spPr>
+          <p:txBody>
+            <a:bodyPr wrap="none" rtlCol="0">
+              <a:spAutoFit/>
+            </a:bodyPr>
+            <a:lstStyle/>
+            <a:p>
+              <a:r>
+                <a:rPr lang="en-US" sz="1600" b="1" dirty="0">
+                  <a:solidFill>
+                    <a:srgbClr val="0070C0"/>
+                  </a:solidFill>
+                  <a:latin typeface="Calibri" panose="020F0502020204030204" pitchFamily="34" charset="0"/>
+                  <a:cs typeface="Calibri" panose="020F0502020204030204" pitchFamily="34" charset="0"/>
+                </a:rPr>
+                <a:t>FTVR</a:t>
+              </a:r>
+            </a:p>
+          </p:txBody>
+        </p:sp>
+        <p:sp>
+          <p:nvSpPr>
+            <p:cNvPr id="62" name="CasellaDiTesto 61">
+              <a:extLst>
+                <a:ext uri="{FF2B5EF4-FFF2-40B4-BE49-F238E27FC236}">
+                  <a16:creationId xmlns:a16="http://schemas.microsoft.com/office/drawing/2014/main" id="{CF9AACCD-0AAC-29D1-3E9D-95F100E73036}"/>
+                </a:ext>
+              </a:extLst>
+            </p:cNvPr>
+            <p:cNvSpPr txBox="1"/>
+            <p:nvPr/>
+          </p:nvSpPr>
+          <p:spPr>
+            <a:xfrm>
+              <a:off x="3227082" y="1222264"/>
+              <a:ext cx="619080" cy="338554"/>
+            </a:xfrm>
+            <a:prstGeom prst="rect">
+              <a:avLst/>
+            </a:prstGeom>
+            <a:noFill/>
+          </p:spPr>
+          <p:txBody>
+            <a:bodyPr wrap="none" rtlCol="0">
+              <a:spAutoFit/>
+            </a:bodyPr>
+            <a:lstStyle/>
+            <a:p>
+              <a:r>
+                <a:rPr lang="en-US" sz="1600" b="1" dirty="0">
+                  <a:solidFill>
+                    <a:schemeClr val="accent2"/>
+                  </a:solidFill>
+                  <a:latin typeface="Calibri" panose="020F0502020204030204" pitchFamily="34" charset="0"/>
+                  <a:cs typeface="Calibri" panose="020F0502020204030204" pitchFamily="34" charset="0"/>
+                </a:rPr>
+                <a:t>ZLRN</a:t>
+              </a:r>
+            </a:p>
+          </p:txBody>
+        </p:sp>
+        <p:sp>
+          <p:nvSpPr>
+            <p:cNvPr id="63" name="CasellaDiTesto 62">
+              <a:extLst>
+                <a:ext uri="{FF2B5EF4-FFF2-40B4-BE49-F238E27FC236}">
+                  <a16:creationId xmlns:a16="http://schemas.microsoft.com/office/drawing/2014/main" id="{3F0436EB-A10B-9523-3493-D8DBC852BE1B}"/>
+                </a:ext>
+              </a:extLst>
+            </p:cNvPr>
+            <p:cNvSpPr txBox="1"/>
+            <p:nvPr/>
+          </p:nvSpPr>
+          <p:spPr>
+            <a:xfrm>
+              <a:off x="1453307" y="2275898"/>
+              <a:ext cx="619080" cy="338554"/>
+            </a:xfrm>
+            <a:prstGeom prst="rect">
+              <a:avLst/>
+            </a:prstGeom>
+            <a:noFill/>
+          </p:spPr>
+          <p:txBody>
+            <a:bodyPr wrap="none" rtlCol="0">
+              <a:spAutoFit/>
+            </a:bodyPr>
+            <a:lstStyle/>
+            <a:p>
+              <a:r>
+                <a:rPr lang="en-US" sz="1600" b="1" dirty="0">
+                  <a:solidFill>
+                    <a:schemeClr val="accent2"/>
+                  </a:solidFill>
+                  <a:latin typeface="Calibri" panose="020F0502020204030204" pitchFamily="34" charset="0"/>
+                  <a:cs typeface="Calibri" panose="020F0502020204030204" pitchFamily="34" charset="0"/>
+                </a:rPr>
+                <a:t>ZLRN</a:t>
+              </a:r>
+            </a:p>
+          </p:txBody>
+        </p:sp>
+        <p:pic>
+          <p:nvPicPr>
+            <p:cNvPr id="9" name="Elemento grafico 8">
+              <a:extLst>
+                <a:ext uri="{FF2B5EF4-FFF2-40B4-BE49-F238E27FC236}">
+                  <a16:creationId xmlns:a16="http://schemas.microsoft.com/office/drawing/2014/main" id="{5E88BE09-CC40-F559-F61D-9B208551E73D}"/>
+                </a:ext>
+              </a:extLst>
+            </p:cNvPr>
+            <p:cNvPicPr>
+              <a:picLocks noChangeAspect="1"/>
+            </p:cNvPicPr>
+            <p:nvPr/>
+          </p:nvPicPr>
+          <p:blipFill>
+            <a:blip r:embed="rId4">
+              <a:extLst>
+                <a:ext uri="{96DAC541-7B7A-43D3-8B79-37D633B846F1}">
+                  <asvg:svgBlip xmlns:asvg="http://schemas.microsoft.com/office/drawing/2016/SVG/main" r:embed="rId5"/>
+                </a:ext>
+              </a:extLst>
+            </a:blip>
+            <a:srcRect r="51728"/>
+            <a:stretch>
+              <a:fillRect/>
+            </a:stretch>
+          </p:blipFill>
+          <p:spPr>
+            <a:xfrm>
+              <a:off x="4363421" y="374258"/>
+              <a:ext cx="3554267" cy="2629619"/>
+            </a:xfrm>
+            <a:prstGeom prst="rect">
+              <a:avLst/>
+            </a:prstGeom>
+          </p:spPr>
+        </p:pic>
+        <p:pic>
+          <p:nvPicPr>
+            <p:cNvPr id="10" name="Elemento grafico 9">
+              <a:extLst>
+                <a:ext uri="{FF2B5EF4-FFF2-40B4-BE49-F238E27FC236}">
+                  <a16:creationId xmlns:a16="http://schemas.microsoft.com/office/drawing/2014/main" id="{A4E62921-88DB-305E-002B-A641833618CB}"/>
+                </a:ext>
+              </a:extLst>
+            </p:cNvPr>
+            <p:cNvPicPr>
+              <a:picLocks noChangeAspect="1"/>
+            </p:cNvPicPr>
+            <p:nvPr/>
+          </p:nvPicPr>
+          <p:blipFill>
+            <a:blip r:embed="rId4">
+              <a:extLst>
+                <a:ext uri="{96DAC541-7B7A-43D3-8B79-37D633B846F1}">
+                  <asvg:svgBlip xmlns:asvg="http://schemas.microsoft.com/office/drawing/2016/SVG/main" r:embed="rId5"/>
+                </a:ext>
+              </a:extLst>
+            </a:blip>
+            <a:srcRect l="48772" r="7632"/>
+            <a:stretch>
+              <a:fillRect/>
+            </a:stretch>
+          </p:blipFill>
+          <p:spPr>
+            <a:xfrm>
+              <a:off x="8545018" y="366324"/>
+              <a:ext cx="3268377" cy="2677447"/>
+            </a:xfrm>
+            <a:prstGeom prst="rect">
+              <a:avLst/>
+            </a:prstGeom>
+          </p:spPr>
+        </p:pic>
+        <p:sp>
+          <p:nvSpPr>
+            <p:cNvPr id="11" name="TextBox 7">
+              <a:extLst>
+                <a:ext uri="{FF2B5EF4-FFF2-40B4-BE49-F238E27FC236}">
+                  <a16:creationId xmlns:a16="http://schemas.microsoft.com/office/drawing/2014/main" id="{678FD919-DFCE-7078-26DC-F30A17B20159}"/>
+                </a:ext>
+              </a:extLst>
+            </p:cNvPr>
+            <p:cNvSpPr txBox="1"/>
+            <p:nvPr/>
+          </p:nvSpPr>
+          <p:spPr>
+            <a:xfrm>
+              <a:off x="8024029" y="135490"/>
+              <a:ext cx="348172" cy="461665"/>
+            </a:xfrm>
+            <a:prstGeom prst="rect">
+              <a:avLst/>
+            </a:prstGeom>
+            <a:noFill/>
+          </p:spPr>
+          <p:txBody>
+            <a:bodyPr wrap="none" rtlCol="0">
+              <a:spAutoFit/>
+            </a:bodyPr>
+            <a:lstStyle/>
+            <a:p>
+              <a:r>
+                <a:rPr lang="en-US" sz="2400" b="1" dirty="0">
+                  <a:latin typeface="Calibri" panose="020F0502020204030204" pitchFamily="34" charset="0"/>
+                  <a:cs typeface="Calibri" panose="020F0502020204030204" pitchFamily="34" charset="0"/>
+                </a:rPr>
+                <a:t>C</a:t>
+              </a:r>
+            </a:p>
+          </p:txBody>
+        </p:sp>
+      </p:grpSp>
+    </p:spTree>
+    <p:extLst>
+      <p:ext uri="{BB962C8B-B14F-4D97-AF65-F5344CB8AC3E}">
+        <p14:creationId xmlns:p14="http://schemas.microsoft.com/office/powerpoint/2010/main" val="2180436436"/>
       </p:ext>
     </p:extLst>
   </p:cSld>
